--- a/1차프로젝트/3. 화면설계서_신혜린.pptx
+++ b/1차프로젝트/3. 화면설계서_신혜린.pptx
@@ -154,8 +154,8 @@
               </a:defRPr>
             </a:pPr>
             <a:r>
-              <a:rPr lang="ko-KR" altLang="en-US" dirty="0" err="1"/>
-              <a:t>산점도</a:t>
+              <a:rPr lang="en-US" altLang="ko-KR" dirty="0"/>
+              <a:t>Result</a:t>
             </a:r>
             <a:endParaRPr lang="ko-KR" altLang="en-US" dirty="0"/>
           </a:p>
@@ -4236,7 +4236,7 @@
         </p:nvSpPr>
         <p:spPr>
           <a:xfrm>
-            <a:off x="152078" y="1687765"/>
+            <a:off x="152078" y="1666463"/>
             <a:ext cx="1019921" cy="518656"/>
           </a:xfrm>
           <a:prstGeom prst="ellipse">
@@ -6240,13 +6240,13 @@
           <p:nvPr>
             <p:extLst>
               <p:ext uri="{D42A27DB-BD31-4B8C-83A1-F6EECF244321}">
-                <p14:modId xmlns:p14="http://schemas.microsoft.com/office/powerpoint/2010/main" val="3456616983"/>
+                <p14:modId xmlns:p14="http://schemas.microsoft.com/office/powerpoint/2010/main" val="1416362385"/>
               </p:ext>
             </p:extLst>
           </p:nvPr>
         </p:nvGraphicFramePr>
         <p:xfrm>
-          <a:off x="195431" y="256973"/>
+          <a:off x="0" y="324403"/>
           <a:ext cx="10818319" cy="736600"/>
         </p:xfrm>
         <a:graphic>
@@ -6931,7 +6931,7 @@
                           <a:latin typeface="Noto Sans KR" panose="020B0200000000000000" pitchFamily="50" charset="-127"/>
                           <a:ea typeface="Noto Sans KR" panose="020B0200000000000000" pitchFamily="50" charset="-127"/>
                         </a:rPr>
-                        <a:t>Main-1</a:t>
+                        <a:t>Main</a:t>
                       </a:r>
                       <a:endParaRPr lang="ko-KR" altLang="en-US" dirty="0">
                         <a:solidFill>
@@ -7576,7 +7576,7 @@
         </p:nvSpPr>
         <p:spPr>
           <a:xfrm>
-            <a:off x="90616" y="1654631"/>
+            <a:off x="152078" y="1645512"/>
             <a:ext cx="1019921" cy="518656"/>
           </a:xfrm>
           <a:prstGeom prst="ellipse">
@@ -8006,14 +8006,14 @@
           <p:nvPr>
             <p:extLst>
               <p:ext uri="{D42A27DB-BD31-4B8C-83A1-F6EECF244321}">
-                <p14:modId xmlns:p14="http://schemas.microsoft.com/office/powerpoint/2010/main" val="497188827"/>
+                <p14:modId xmlns:p14="http://schemas.microsoft.com/office/powerpoint/2010/main" val="4066965914"/>
               </p:ext>
             </p:extLst>
           </p:nvPr>
         </p:nvGraphicFramePr>
         <p:xfrm>
           <a:off x="9593342" y="1515542"/>
-          <a:ext cx="2528345" cy="2712720"/>
+          <a:ext cx="2528345" cy="883920"/>
         </p:xfrm>
         <a:graphic>
           <a:graphicData uri="http://schemas.openxmlformats.org/drawingml/2006/table">
@@ -8289,596 +8289,6 @@
                 <a:extLst>
                   <a:ext uri="{0D108BD9-81ED-4DB2-BD59-A6C34878D82A}">
                     <a16:rowId xmlns:a16="http://schemas.microsoft.com/office/drawing/2014/main" val="556868843"/>
-                  </a:ext>
-                </a:extLst>
-              </a:tr>
-              <a:tr h="355331">
-                <a:tc>
-                  <a:txBody>
-                    <a:bodyPr/>
-                    <a:lstStyle/>
-                    <a:p>
-                      <a:pPr algn="ctr" latinLnBrk="1"/>
-                      <a:r>
-                        <a:rPr lang="en-US" altLang="ko-KR" dirty="0">
-                          <a:latin typeface="Noto Sans KR" panose="020B0200000000000000" pitchFamily="50" charset="-127"/>
-                          <a:ea typeface="Noto Sans KR" panose="020B0200000000000000" pitchFamily="50" charset="-127"/>
-                        </a:rPr>
-                        <a:t>2</a:t>
-                      </a:r>
-                      <a:endParaRPr lang="ko-KR" altLang="en-US" dirty="0">
-                        <a:latin typeface="Noto Sans KR" panose="020B0200000000000000" pitchFamily="50" charset="-127"/>
-                        <a:ea typeface="Noto Sans KR" panose="020B0200000000000000" pitchFamily="50" charset="-127"/>
-                      </a:endParaRPr>
-                    </a:p>
-                  </a:txBody>
-                  <a:tcPr>
-                    <a:lnL w="12700" cap="flat" cmpd="sng" algn="ctr">
-                      <a:solidFill>
-                        <a:schemeClr val="tx1"/>
-                      </a:solidFill>
-                      <a:prstDash val="solid"/>
-                      <a:round/>
-                      <a:headEnd type="none" w="med" len="med"/>
-                      <a:tailEnd type="none" w="med" len="med"/>
-                    </a:lnL>
-                    <a:lnR w="12700" cap="flat" cmpd="sng" algn="ctr">
-                      <a:solidFill>
-                        <a:schemeClr val="tx1"/>
-                      </a:solidFill>
-                      <a:prstDash val="solid"/>
-                      <a:round/>
-                      <a:headEnd type="none" w="med" len="med"/>
-                      <a:tailEnd type="none" w="med" len="med"/>
-                    </a:lnR>
-                    <a:lnT w="12700" cap="flat" cmpd="sng" algn="ctr">
-                      <a:solidFill>
-                        <a:schemeClr val="tx1"/>
-                      </a:solidFill>
-                      <a:prstDash val="solid"/>
-                      <a:round/>
-                      <a:headEnd type="none" w="med" len="med"/>
-                      <a:tailEnd type="none" w="med" len="med"/>
-                    </a:lnT>
-                    <a:lnB w="12700" cap="flat" cmpd="sng" algn="ctr">
-                      <a:solidFill>
-                        <a:schemeClr val="tx1"/>
-                      </a:solidFill>
-                      <a:prstDash val="solid"/>
-                      <a:round/>
-                      <a:headEnd type="none" w="med" len="med"/>
-                      <a:tailEnd type="none" w="med" len="med"/>
-                    </a:lnB>
-                    <a:noFill/>
-                  </a:tcPr>
-                </a:tc>
-                <a:tc>
-                  <a:txBody>
-                    <a:bodyPr/>
-                    <a:lstStyle/>
-                    <a:p>
-                      <a:pPr algn="l" latinLnBrk="1"/>
-                      <a:endParaRPr lang="ko-KR" altLang="en-US" sz="1400" dirty="0">
-                        <a:latin typeface="Noto Sans KR" panose="020B0200000000000000" pitchFamily="50" charset="-127"/>
-                        <a:ea typeface="Noto Sans KR" panose="020B0200000000000000" pitchFamily="50" charset="-127"/>
-                      </a:endParaRPr>
-                    </a:p>
-                  </a:txBody>
-                  <a:tcPr>
-                    <a:lnL w="12700" cap="flat" cmpd="sng" algn="ctr">
-                      <a:solidFill>
-                        <a:schemeClr val="tx1"/>
-                      </a:solidFill>
-                      <a:prstDash val="solid"/>
-                      <a:round/>
-                      <a:headEnd type="none" w="med" len="med"/>
-                      <a:tailEnd type="none" w="med" len="med"/>
-                    </a:lnL>
-                    <a:lnR w="12700" cap="flat" cmpd="sng" algn="ctr">
-                      <a:solidFill>
-                        <a:schemeClr val="tx1"/>
-                      </a:solidFill>
-                      <a:prstDash val="solid"/>
-                      <a:round/>
-                      <a:headEnd type="none" w="med" len="med"/>
-                      <a:tailEnd type="none" w="med" len="med"/>
-                    </a:lnR>
-                    <a:lnT w="12700" cap="flat" cmpd="sng" algn="ctr">
-                      <a:solidFill>
-                        <a:schemeClr val="tx1"/>
-                      </a:solidFill>
-                      <a:prstDash val="solid"/>
-                      <a:round/>
-                      <a:headEnd type="none" w="med" len="med"/>
-                      <a:tailEnd type="none" w="med" len="med"/>
-                    </a:lnT>
-                    <a:lnB w="12700" cap="flat" cmpd="sng" algn="ctr">
-                      <a:solidFill>
-                        <a:schemeClr val="tx1"/>
-                      </a:solidFill>
-                      <a:prstDash val="solid"/>
-                      <a:round/>
-                      <a:headEnd type="none" w="med" len="med"/>
-                      <a:tailEnd type="none" w="med" len="med"/>
-                    </a:lnB>
-                    <a:noFill/>
-                  </a:tcPr>
-                </a:tc>
-                <a:extLst>
-                  <a:ext uri="{0D108BD9-81ED-4DB2-BD59-A6C34878D82A}">
-                    <a16:rowId xmlns:a16="http://schemas.microsoft.com/office/drawing/2014/main" val="2175718920"/>
-                  </a:ext>
-                </a:extLst>
-              </a:tr>
-              <a:tr h="355331">
-                <a:tc>
-                  <a:txBody>
-                    <a:bodyPr/>
-                    <a:lstStyle/>
-                    <a:p>
-                      <a:pPr algn="ctr" latinLnBrk="1"/>
-                      <a:r>
-                        <a:rPr lang="en-US" altLang="ko-KR" dirty="0">
-                          <a:latin typeface="Noto Sans KR" panose="020B0200000000000000" pitchFamily="50" charset="-127"/>
-                          <a:ea typeface="Noto Sans KR" panose="020B0200000000000000" pitchFamily="50" charset="-127"/>
-                        </a:rPr>
-                        <a:t>3</a:t>
-                      </a:r>
-                      <a:endParaRPr lang="ko-KR" altLang="en-US" dirty="0">
-                        <a:latin typeface="Noto Sans KR" panose="020B0200000000000000" pitchFamily="50" charset="-127"/>
-                        <a:ea typeface="Noto Sans KR" panose="020B0200000000000000" pitchFamily="50" charset="-127"/>
-                      </a:endParaRPr>
-                    </a:p>
-                  </a:txBody>
-                  <a:tcPr>
-                    <a:lnL w="12700" cap="flat" cmpd="sng" algn="ctr">
-                      <a:solidFill>
-                        <a:schemeClr val="tx1"/>
-                      </a:solidFill>
-                      <a:prstDash val="solid"/>
-                      <a:round/>
-                      <a:headEnd type="none" w="med" len="med"/>
-                      <a:tailEnd type="none" w="med" len="med"/>
-                    </a:lnL>
-                    <a:lnR w="12700" cap="flat" cmpd="sng" algn="ctr">
-                      <a:solidFill>
-                        <a:schemeClr val="tx1"/>
-                      </a:solidFill>
-                      <a:prstDash val="solid"/>
-                      <a:round/>
-                      <a:headEnd type="none" w="med" len="med"/>
-                      <a:tailEnd type="none" w="med" len="med"/>
-                    </a:lnR>
-                    <a:lnT w="12700" cap="flat" cmpd="sng" algn="ctr">
-                      <a:solidFill>
-                        <a:schemeClr val="tx1"/>
-                      </a:solidFill>
-                      <a:prstDash val="solid"/>
-                      <a:round/>
-                      <a:headEnd type="none" w="med" len="med"/>
-                      <a:tailEnd type="none" w="med" len="med"/>
-                    </a:lnT>
-                    <a:lnB w="12700" cap="flat" cmpd="sng" algn="ctr">
-                      <a:solidFill>
-                        <a:schemeClr val="tx1"/>
-                      </a:solidFill>
-                      <a:prstDash val="solid"/>
-                      <a:round/>
-                      <a:headEnd type="none" w="med" len="med"/>
-                      <a:tailEnd type="none" w="med" len="med"/>
-                    </a:lnB>
-                    <a:noFill/>
-                  </a:tcPr>
-                </a:tc>
-                <a:tc>
-                  <a:txBody>
-                    <a:bodyPr/>
-                    <a:lstStyle/>
-                    <a:p>
-                      <a:pPr algn="l" latinLnBrk="1"/>
-                      <a:endParaRPr lang="ko-KR" altLang="en-US" sz="1400" dirty="0">
-                        <a:latin typeface="Noto Sans KR" panose="020B0200000000000000" pitchFamily="50" charset="-127"/>
-                        <a:ea typeface="Noto Sans KR" panose="020B0200000000000000" pitchFamily="50" charset="-127"/>
-                      </a:endParaRPr>
-                    </a:p>
-                  </a:txBody>
-                  <a:tcPr>
-                    <a:lnL w="12700" cap="flat" cmpd="sng" algn="ctr">
-                      <a:solidFill>
-                        <a:schemeClr val="tx1"/>
-                      </a:solidFill>
-                      <a:prstDash val="solid"/>
-                      <a:round/>
-                      <a:headEnd type="none" w="med" len="med"/>
-                      <a:tailEnd type="none" w="med" len="med"/>
-                    </a:lnL>
-                    <a:lnR w="12700" cap="flat" cmpd="sng" algn="ctr">
-                      <a:solidFill>
-                        <a:schemeClr val="tx1"/>
-                      </a:solidFill>
-                      <a:prstDash val="solid"/>
-                      <a:round/>
-                      <a:headEnd type="none" w="med" len="med"/>
-                      <a:tailEnd type="none" w="med" len="med"/>
-                    </a:lnR>
-                    <a:lnT w="12700" cap="flat" cmpd="sng" algn="ctr">
-                      <a:solidFill>
-                        <a:schemeClr val="tx1"/>
-                      </a:solidFill>
-                      <a:prstDash val="solid"/>
-                      <a:round/>
-                      <a:headEnd type="none" w="med" len="med"/>
-                      <a:tailEnd type="none" w="med" len="med"/>
-                    </a:lnT>
-                    <a:lnB w="12700" cap="flat" cmpd="sng" algn="ctr">
-                      <a:solidFill>
-                        <a:schemeClr val="tx1"/>
-                      </a:solidFill>
-                      <a:prstDash val="solid"/>
-                      <a:round/>
-                      <a:headEnd type="none" w="med" len="med"/>
-                      <a:tailEnd type="none" w="med" len="med"/>
-                    </a:lnB>
-                    <a:noFill/>
-                  </a:tcPr>
-                </a:tc>
-                <a:extLst>
-                  <a:ext uri="{0D108BD9-81ED-4DB2-BD59-A6C34878D82A}">
-                    <a16:rowId xmlns:a16="http://schemas.microsoft.com/office/drawing/2014/main" val="1888026692"/>
-                  </a:ext>
-                </a:extLst>
-              </a:tr>
-              <a:tr h="355331">
-                <a:tc>
-                  <a:txBody>
-                    <a:bodyPr/>
-                    <a:lstStyle/>
-                    <a:p>
-                      <a:pPr algn="ctr" latinLnBrk="1"/>
-                      <a:r>
-                        <a:rPr lang="en-US" altLang="ko-KR" dirty="0">
-                          <a:latin typeface="Noto Sans KR" panose="020B0200000000000000" pitchFamily="50" charset="-127"/>
-                          <a:ea typeface="Noto Sans KR" panose="020B0200000000000000" pitchFamily="50" charset="-127"/>
-                        </a:rPr>
-                        <a:t>4</a:t>
-                      </a:r>
-                      <a:endParaRPr lang="ko-KR" altLang="en-US" dirty="0">
-                        <a:latin typeface="Noto Sans KR" panose="020B0200000000000000" pitchFamily="50" charset="-127"/>
-                        <a:ea typeface="Noto Sans KR" panose="020B0200000000000000" pitchFamily="50" charset="-127"/>
-                      </a:endParaRPr>
-                    </a:p>
-                  </a:txBody>
-                  <a:tcPr>
-                    <a:lnL w="12700" cap="flat" cmpd="sng" algn="ctr">
-                      <a:solidFill>
-                        <a:schemeClr val="tx1"/>
-                      </a:solidFill>
-                      <a:prstDash val="solid"/>
-                      <a:round/>
-                      <a:headEnd type="none" w="med" len="med"/>
-                      <a:tailEnd type="none" w="med" len="med"/>
-                    </a:lnL>
-                    <a:lnR w="12700" cap="flat" cmpd="sng" algn="ctr">
-                      <a:solidFill>
-                        <a:schemeClr val="tx1"/>
-                      </a:solidFill>
-                      <a:prstDash val="solid"/>
-                      <a:round/>
-                      <a:headEnd type="none" w="med" len="med"/>
-                      <a:tailEnd type="none" w="med" len="med"/>
-                    </a:lnR>
-                    <a:lnT w="12700" cap="flat" cmpd="sng" algn="ctr">
-                      <a:solidFill>
-                        <a:schemeClr val="tx1"/>
-                      </a:solidFill>
-                      <a:prstDash val="solid"/>
-                      <a:round/>
-                      <a:headEnd type="none" w="med" len="med"/>
-                      <a:tailEnd type="none" w="med" len="med"/>
-                    </a:lnT>
-                    <a:lnB w="12700" cap="flat" cmpd="sng" algn="ctr">
-                      <a:solidFill>
-                        <a:schemeClr val="tx1"/>
-                      </a:solidFill>
-                      <a:prstDash val="solid"/>
-                      <a:round/>
-                      <a:headEnd type="none" w="med" len="med"/>
-                      <a:tailEnd type="none" w="med" len="med"/>
-                    </a:lnB>
-                    <a:noFill/>
-                  </a:tcPr>
-                </a:tc>
-                <a:tc>
-                  <a:txBody>
-                    <a:bodyPr/>
-                    <a:lstStyle/>
-                    <a:p>
-                      <a:pPr algn="l" latinLnBrk="1"/>
-                      <a:endParaRPr lang="ko-KR" altLang="en-US" sz="1400" dirty="0">
-                        <a:latin typeface="Noto Sans KR" panose="020B0200000000000000" pitchFamily="50" charset="-127"/>
-                        <a:ea typeface="Noto Sans KR" panose="020B0200000000000000" pitchFamily="50" charset="-127"/>
-                      </a:endParaRPr>
-                    </a:p>
-                  </a:txBody>
-                  <a:tcPr>
-                    <a:lnL w="12700" cap="flat" cmpd="sng" algn="ctr">
-                      <a:solidFill>
-                        <a:schemeClr val="tx1"/>
-                      </a:solidFill>
-                      <a:prstDash val="solid"/>
-                      <a:round/>
-                      <a:headEnd type="none" w="med" len="med"/>
-                      <a:tailEnd type="none" w="med" len="med"/>
-                    </a:lnL>
-                    <a:lnR w="12700" cap="flat" cmpd="sng" algn="ctr">
-                      <a:solidFill>
-                        <a:schemeClr val="tx1"/>
-                      </a:solidFill>
-                      <a:prstDash val="solid"/>
-                      <a:round/>
-                      <a:headEnd type="none" w="med" len="med"/>
-                      <a:tailEnd type="none" w="med" len="med"/>
-                    </a:lnR>
-                    <a:lnT w="12700" cap="flat" cmpd="sng" algn="ctr">
-                      <a:solidFill>
-                        <a:schemeClr val="tx1"/>
-                      </a:solidFill>
-                      <a:prstDash val="solid"/>
-                      <a:round/>
-                      <a:headEnd type="none" w="med" len="med"/>
-                      <a:tailEnd type="none" w="med" len="med"/>
-                    </a:lnT>
-                    <a:lnB w="12700" cap="flat" cmpd="sng" algn="ctr">
-                      <a:solidFill>
-                        <a:schemeClr val="tx1"/>
-                      </a:solidFill>
-                      <a:prstDash val="solid"/>
-                      <a:round/>
-                      <a:headEnd type="none" w="med" len="med"/>
-                      <a:tailEnd type="none" w="med" len="med"/>
-                    </a:lnB>
-                    <a:noFill/>
-                  </a:tcPr>
-                </a:tc>
-                <a:extLst>
-                  <a:ext uri="{0D108BD9-81ED-4DB2-BD59-A6C34878D82A}">
-                    <a16:rowId xmlns:a16="http://schemas.microsoft.com/office/drawing/2014/main" val="163760298"/>
-                  </a:ext>
-                </a:extLst>
-              </a:tr>
-              <a:tr h="355331">
-                <a:tc>
-                  <a:txBody>
-                    <a:bodyPr/>
-                    <a:lstStyle/>
-                    <a:p>
-                      <a:pPr algn="ctr" latinLnBrk="1"/>
-                      <a:r>
-                        <a:rPr lang="en-US" altLang="ko-KR" dirty="0">
-                          <a:latin typeface="Noto Sans KR" panose="020B0200000000000000" pitchFamily="50" charset="-127"/>
-                          <a:ea typeface="Noto Sans KR" panose="020B0200000000000000" pitchFamily="50" charset="-127"/>
-                        </a:rPr>
-                        <a:t>5</a:t>
-                      </a:r>
-                      <a:endParaRPr lang="ko-KR" altLang="en-US" dirty="0">
-                        <a:latin typeface="Noto Sans KR" panose="020B0200000000000000" pitchFamily="50" charset="-127"/>
-                        <a:ea typeface="Noto Sans KR" panose="020B0200000000000000" pitchFamily="50" charset="-127"/>
-                      </a:endParaRPr>
-                    </a:p>
-                  </a:txBody>
-                  <a:tcPr>
-                    <a:lnL w="12700" cap="flat" cmpd="sng" algn="ctr">
-                      <a:solidFill>
-                        <a:schemeClr val="tx1"/>
-                      </a:solidFill>
-                      <a:prstDash val="solid"/>
-                      <a:round/>
-                      <a:headEnd type="none" w="med" len="med"/>
-                      <a:tailEnd type="none" w="med" len="med"/>
-                    </a:lnL>
-                    <a:lnR w="12700" cap="flat" cmpd="sng" algn="ctr">
-                      <a:solidFill>
-                        <a:schemeClr val="tx1"/>
-                      </a:solidFill>
-                      <a:prstDash val="solid"/>
-                      <a:round/>
-                      <a:headEnd type="none" w="med" len="med"/>
-                      <a:tailEnd type="none" w="med" len="med"/>
-                    </a:lnR>
-                    <a:lnT w="12700" cap="flat" cmpd="sng" algn="ctr">
-                      <a:solidFill>
-                        <a:schemeClr val="tx1"/>
-                      </a:solidFill>
-                      <a:prstDash val="solid"/>
-                      <a:round/>
-                      <a:headEnd type="none" w="med" len="med"/>
-                      <a:tailEnd type="none" w="med" len="med"/>
-                    </a:lnT>
-                    <a:lnB w="12700" cap="flat" cmpd="sng" algn="ctr">
-                      <a:solidFill>
-                        <a:schemeClr val="tx1"/>
-                      </a:solidFill>
-                      <a:prstDash val="solid"/>
-                      <a:round/>
-                      <a:headEnd type="none" w="med" len="med"/>
-                      <a:tailEnd type="none" w="med" len="med"/>
-                    </a:lnB>
-                    <a:noFill/>
-                  </a:tcPr>
-                </a:tc>
-                <a:tc>
-                  <a:txBody>
-                    <a:bodyPr/>
-                    <a:lstStyle/>
-                    <a:p>
-                      <a:pPr algn="l" latinLnBrk="1"/>
-                      <a:endParaRPr lang="ko-KR" altLang="en-US" sz="1400" dirty="0">
-                        <a:latin typeface="Noto Sans KR" panose="020B0200000000000000" pitchFamily="50" charset="-127"/>
-                        <a:ea typeface="Noto Sans KR" panose="020B0200000000000000" pitchFamily="50" charset="-127"/>
-                      </a:endParaRPr>
-                    </a:p>
-                  </a:txBody>
-                  <a:tcPr>
-                    <a:lnL w="12700" cap="flat" cmpd="sng" algn="ctr">
-                      <a:solidFill>
-                        <a:schemeClr val="tx1"/>
-                      </a:solidFill>
-                      <a:prstDash val="solid"/>
-                      <a:round/>
-                      <a:headEnd type="none" w="med" len="med"/>
-                      <a:tailEnd type="none" w="med" len="med"/>
-                    </a:lnL>
-                    <a:lnR w="12700" cap="flat" cmpd="sng" algn="ctr">
-                      <a:solidFill>
-                        <a:schemeClr val="tx1"/>
-                      </a:solidFill>
-                      <a:prstDash val="solid"/>
-                      <a:round/>
-                      <a:headEnd type="none" w="med" len="med"/>
-                      <a:tailEnd type="none" w="med" len="med"/>
-                    </a:lnR>
-                    <a:lnT w="12700" cap="flat" cmpd="sng" algn="ctr">
-                      <a:solidFill>
-                        <a:schemeClr val="tx1"/>
-                      </a:solidFill>
-                      <a:prstDash val="solid"/>
-                      <a:round/>
-                      <a:headEnd type="none" w="med" len="med"/>
-                      <a:tailEnd type="none" w="med" len="med"/>
-                    </a:lnT>
-                    <a:lnB w="12700" cap="flat" cmpd="sng" algn="ctr">
-                      <a:solidFill>
-                        <a:schemeClr val="tx1"/>
-                      </a:solidFill>
-                      <a:prstDash val="solid"/>
-                      <a:round/>
-                      <a:headEnd type="none" w="med" len="med"/>
-                      <a:tailEnd type="none" w="med" len="med"/>
-                    </a:lnB>
-                    <a:noFill/>
-                  </a:tcPr>
-                </a:tc>
-                <a:extLst>
-                  <a:ext uri="{0D108BD9-81ED-4DB2-BD59-A6C34878D82A}">
-                    <a16:rowId xmlns:a16="http://schemas.microsoft.com/office/drawing/2014/main" val="1949926814"/>
-                  </a:ext>
-                </a:extLst>
-              </a:tr>
-              <a:tr h="355331">
-                <a:tc>
-                  <a:txBody>
-                    <a:bodyPr/>
-                    <a:lstStyle/>
-                    <a:p>
-                      <a:pPr algn="ctr" latinLnBrk="1"/>
-                      <a:r>
-                        <a:rPr lang="en-US" altLang="ko-KR" dirty="0">
-                          <a:latin typeface="Noto Sans KR" panose="020B0200000000000000" pitchFamily="50" charset="-127"/>
-                          <a:ea typeface="Noto Sans KR" panose="020B0200000000000000" pitchFamily="50" charset="-127"/>
-                        </a:rPr>
-                        <a:t>6</a:t>
-                      </a:r>
-                      <a:endParaRPr lang="ko-KR" altLang="en-US" dirty="0">
-                        <a:latin typeface="Noto Sans KR" panose="020B0200000000000000" pitchFamily="50" charset="-127"/>
-                        <a:ea typeface="Noto Sans KR" panose="020B0200000000000000" pitchFamily="50" charset="-127"/>
-                      </a:endParaRPr>
-                    </a:p>
-                  </a:txBody>
-                  <a:tcPr>
-                    <a:lnL w="12700" cap="flat" cmpd="sng" algn="ctr">
-                      <a:solidFill>
-                        <a:schemeClr val="tx1"/>
-                      </a:solidFill>
-                      <a:prstDash val="solid"/>
-                      <a:round/>
-                      <a:headEnd type="none" w="med" len="med"/>
-                      <a:tailEnd type="none" w="med" len="med"/>
-                    </a:lnL>
-                    <a:lnR w="12700" cap="flat" cmpd="sng" algn="ctr">
-                      <a:solidFill>
-                        <a:schemeClr val="tx1"/>
-                      </a:solidFill>
-                      <a:prstDash val="solid"/>
-                      <a:round/>
-                      <a:headEnd type="none" w="med" len="med"/>
-                      <a:tailEnd type="none" w="med" len="med"/>
-                    </a:lnR>
-                    <a:lnT w="12700" cap="flat" cmpd="sng" algn="ctr">
-                      <a:solidFill>
-                        <a:schemeClr val="tx1"/>
-                      </a:solidFill>
-                      <a:prstDash val="solid"/>
-                      <a:round/>
-                      <a:headEnd type="none" w="med" len="med"/>
-                      <a:tailEnd type="none" w="med" len="med"/>
-                    </a:lnT>
-                    <a:lnB w="12700" cap="flat" cmpd="sng" algn="ctr">
-                      <a:solidFill>
-                        <a:schemeClr val="tx1"/>
-                      </a:solidFill>
-                      <a:prstDash val="solid"/>
-                      <a:round/>
-                      <a:headEnd type="none" w="med" len="med"/>
-                      <a:tailEnd type="none" w="med" len="med"/>
-                    </a:lnB>
-                    <a:noFill/>
-                  </a:tcPr>
-                </a:tc>
-                <a:tc>
-                  <a:txBody>
-                    <a:bodyPr/>
-                    <a:lstStyle/>
-                    <a:p>
-                      <a:pPr algn="l" latinLnBrk="1"/>
-                      <a:endParaRPr lang="ko-KR" altLang="en-US" sz="1400" dirty="0">
-                        <a:latin typeface="Noto Sans KR" panose="020B0200000000000000" pitchFamily="50" charset="-127"/>
-                        <a:ea typeface="Noto Sans KR" panose="020B0200000000000000" pitchFamily="50" charset="-127"/>
-                      </a:endParaRPr>
-                    </a:p>
-                  </a:txBody>
-                  <a:tcPr>
-                    <a:lnL w="12700" cap="flat" cmpd="sng" algn="ctr">
-                      <a:solidFill>
-                        <a:schemeClr val="tx1"/>
-                      </a:solidFill>
-                      <a:prstDash val="solid"/>
-                      <a:round/>
-                      <a:headEnd type="none" w="med" len="med"/>
-                      <a:tailEnd type="none" w="med" len="med"/>
-                    </a:lnL>
-                    <a:lnR w="12700" cap="flat" cmpd="sng" algn="ctr">
-                      <a:solidFill>
-                        <a:schemeClr val="tx1"/>
-                      </a:solidFill>
-                      <a:prstDash val="solid"/>
-                      <a:round/>
-                      <a:headEnd type="none" w="med" len="med"/>
-                      <a:tailEnd type="none" w="med" len="med"/>
-                    </a:lnR>
-                    <a:lnT w="12700" cap="flat" cmpd="sng" algn="ctr">
-                      <a:solidFill>
-                        <a:schemeClr val="tx1"/>
-                      </a:solidFill>
-                      <a:prstDash val="solid"/>
-                      <a:round/>
-                      <a:headEnd type="none" w="med" len="med"/>
-                      <a:tailEnd type="none" w="med" len="med"/>
-                    </a:lnT>
-                    <a:lnB w="12700" cap="flat" cmpd="sng" algn="ctr">
-                      <a:solidFill>
-                        <a:schemeClr val="tx1"/>
-                      </a:solidFill>
-                      <a:prstDash val="solid"/>
-                      <a:round/>
-                      <a:headEnd type="none" w="med" len="med"/>
-                      <a:tailEnd type="none" w="med" len="med"/>
-                    </a:lnB>
-                    <a:noFill/>
-                  </a:tcPr>
-                </a:tc>
-                <a:extLst>
-                  <a:ext uri="{0D108BD9-81ED-4DB2-BD59-A6C34878D82A}">
-                    <a16:rowId xmlns:a16="http://schemas.microsoft.com/office/drawing/2014/main" val="1292618069"/>
                   </a:ext>
                 </a:extLst>
               </a:tr>
@@ -8971,13 +8381,13 @@
           <p:nvPr>
             <p:extLst>
               <p:ext uri="{D42A27DB-BD31-4B8C-83A1-F6EECF244321}">
-                <p14:modId xmlns:p14="http://schemas.microsoft.com/office/powerpoint/2010/main" val="3886642483"/>
+                <p14:modId xmlns:p14="http://schemas.microsoft.com/office/powerpoint/2010/main" val="3215058889"/>
               </p:ext>
             </p:extLst>
           </p:nvPr>
         </p:nvGraphicFramePr>
         <p:xfrm>
-          <a:off x="195431" y="256973"/>
+          <a:off x="0" y="330121"/>
           <a:ext cx="10818319" cy="736600"/>
         </p:xfrm>
         <a:graphic>
@@ -9260,7 +8670,7 @@
                           <a:latin typeface="Noto Sans KR" panose="020B0200000000000000" pitchFamily="50" charset="-127"/>
                           <a:ea typeface="Noto Sans KR" panose="020B0200000000000000" pitchFamily="50" charset="-127"/>
                         </a:rPr>
-                        <a:t>Main-1</a:t>
+                        <a:t>Nav-1</a:t>
                       </a:r>
                       <a:endParaRPr lang="ko-KR" altLang="en-US" b="0" dirty="0">
                         <a:solidFill>
@@ -10650,14 +10060,14 @@
           <p:nvPr>
             <p:extLst>
               <p:ext uri="{D42A27DB-BD31-4B8C-83A1-F6EECF244321}">
-                <p14:modId xmlns:p14="http://schemas.microsoft.com/office/powerpoint/2010/main" val="3059116612"/>
+                <p14:modId xmlns:p14="http://schemas.microsoft.com/office/powerpoint/2010/main" val="3632783334"/>
               </p:ext>
             </p:extLst>
           </p:nvPr>
         </p:nvGraphicFramePr>
         <p:xfrm>
           <a:off x="9593342" y="1515542"/>
-          <a:ext cx="2528345" cy="2865120"/>
+          <a:ext cx="2528345" cy="1402080"/>
         </p:xfrm>
         <a:graphic>
           <a:graphicData uri="http://schemas.openxmlformats.org/drawingml/2006/table">
@@ -11084,478 +10494,6 @@
                   </a:ext>
                 </a:extLst>
               </a:tr>
-              <a:tr h="355331">
-                <a:tc>
-                  <a:txBody>
-                    <a:bodyPr/>
-                    <a:lstStyle/>
-                    <a:p>
-                      <a:pPr algn="ctr" latinLnBrk="1"/>
-                      <a:r>
-                        <a:rPr lang="en-US" altLang="ko-KR" dirty="0">
-                          <a:latin typeface="Noto Sans KR" panose="020B0200000000000000" pitchFamily="50" charset="-127"/>
-                          <a:ea typeface="Noto Sans KR" panose="020B0200000000000000" pitchFamily="50" charset="-127"/>
-                        </a:rPr>
-                        <a:t>3</a:t>
-                      </a:r>
-                      <a:endParaRPr lang="ko-KR" altLang="en-US" dirty="0">
-                        <a:latin typeface="Noto Sans KR" panose="020B0200000000000000" pitchFamily="50" charset="-127"/>
-                        <a:ea typeface="Noto Sans KR" panose="020B0200000000000000" pitchFamily="50" charset="-127"/>
-                      </a:endParaRPr>
-                    </a:p>
-                  </a:txBody>
-                  <a:tcPr>
-                    <a:lnL w="12700" cap="flat" cmpd="sng" algn="ctr">
-                      <a:solidFill>
-                        <a:schemeClr val="tx1"/>
-                      </a:solidFill>
-                      <a:prstDash val="solid"/>
-                      <a:round/>
-                      <a:headEnd type="none" w="med" len="med"/>
-                      <a:tailEnd type="none" w="med" len="med"/>
-                    </a:lnL>
-                    <a:lnR w="12700" cap="flat" cmpd="sng" algn="ctr">
-                      <a:solidFill>
-                        <a:schemeClr val="tx1"/>
-                      </a:solidFill>
-                      <a:prstDash val="solid"/>
-                      <a:round/>
-                      <a:headEnd type="none" w="med" len="med"/>
-                      <a:tailEnd type="none" w="med" len="med"/>
-                    </a:lnR>
-                    <a:lnT w="12700" cap="flat" cmpd="sng" algn="ctr">
-                      <a:solidFill>
-                        <a:schemeClr val="tx1"/>
-                      </a:solidFill>
-                      <a:prstDash val="solid"/>
-                      <a:round/>
-                      <a:headEnd type="none" w="med" len="med"/>
-                      <a:tailEnd type="none" w="med" len="med"/>
-                    </a:lnT>
-                    <a:lnB w="12700" cap="flat" cmpd="sng" algn="ctr">
-                      <a:solidFill>
-                        <a:schemeClr val="tx1"/>
-                      </a:solidFill>
-                      <a:prstDash val="solid"/>
-                      <a:round/>
-                      <a:headEnd type="none" w="med" len="med"/>
-                      <a:tailEnd type="none" w="med" len="med"/>
-                    </a:lnB>
-                    <a:noFill/>
-                  </a:tcPr>
-                </a:tc>
-                <a:tc>
-                  <a:txBody>
-                    <a:bodyPr/>
-                    <a:lstStyle/>
-                    <a:p>
-                      <a:pPr algn="l" latinLnBrk="1"/>
-                      <a:endParaRPr lang="ko-KR" altLang="en-US" sz="1400" dirty="0">
-                        <a:latin typeface="Noto Sans KR" panose="020B0200000000000000" pitchFamily="50" charset="-127"/>
-                        <a:ea typeface="Noto Sans KR" panose="020B0200000000000000" pitchFamily="50" charset="-127"/>
-                      </a:endParaRPr>
-                    </a:p>
-                  </a:txBody>
-                  <a:tcPr>
-                    <a:lnL w="12700" cap="flat" cmpd="sng" algn="ctr">
-                      <a:solidFill>
-                        <a:schemeClr val="tx1"/>
-                      </a:solidFill>
-                      <a:prstDash val="solid"/>
-                      <a:round/>
-                      <a:headEnd type="none" w="med" len="med"/>
-                      <a:tailEnd type="none" w="med" len="med"/>
-                    </a:lnL>
-                    <a:lnR w="12700" cap="flat" cmpd="sng" algn="ctr">
-                      <a:solidFill>
-                        <a:schemeClr val="tx1"/>
-                      </a:solidFill>
-                      <a:prstDash val="solid"/>
-                      <a:round/>
-                      <a:headEnd type="none" w="med" len="med"/>
-                      <a:tailEnd type="none" w="med" len="med"/>
-                    </a:lnR>
-                    <a:lnT w="12700" cap="flat" cmpd="sng" algn="ctr">
-                      <a:solidFill>
-                        <a:schemeClr val="tx1"/>
-                      </a:solidFill>
-                      <a:prstDash val="solid"/>
-                      <a:round/>
-                      <a:headEnd type="none" w="med" len="med"/>
-                      <a:tailEnd type="none" w="med" len="med"/>
-                    </a:lnT>
-                    <a:lnB w="12700" cap="flat" cmpd="sng" algn="ctr">
-                      <a:solidFill>
-                        <a:schemeClr val="tx1"/>
-                      </a:solidFill>
-                      <a:prstDash val="solid"/>
-                      <a:round/>
-                      <a:headEnd type="none" w="med" len="med"/>
-                      <a:tailEnd type="none" w="med" len="med"/>
-                    </a:lnB>
-                    <a:noFill/>
-                  </a:tcPr>
-                </a:tc>
-                <a:extLst>
-                  <a:ext uri="{0D108BD9-81ED-4DB2-BD59-A6C34878D82A}">
-                    <a16:rowId xmlns:a16="http://schemas.microsoft.com/office/drawing/2014/main" val="1888026692"/>
-                  </a:ext>
-                </a:extLst>
-              </a:tr>
-              <a:tr h="355331">
-                <a:tc>
-                  <a:txBody>
-                    <a:bodyPr/>
-                    <a:lstStyle/>
-                    <a:p>
-                      <a:pPr algn="ctr" latinLnBrk="1"/>
-                      <a:r>
-                        <a:rPr lang="en-US" altLang="ko-KR" dirty="0">
-                          <a:latin typeface="Noto Sans KR" panose="020B0200000000000000" pitchFamily="50" charset="-127"/>
-                          <a:ea typeface="Noto Sans KR" panose="020B0200000000000000" pitchFamily="50" charset="-127"/>
-                        </a:rPr>
-                        <a:t>4</a:t>
-                      </a:r>
-                      <a:endParaRPr lang="ko-KR" altLang="en-US" dirty="0">
-                        <a:latin typeface="Noto Sans KR" panose="020B0200000000000000" pitchFamily="50" charset="-127"/>
-                        <a:ea typeface="Noto Sans KR" panose="020B0200000000000000" pitchFamily="50" charset="-127"/>
-                      </a:endParaRPr>
-                    </a:p>
-                  </a:txBody>
-                  <a:tcPr>
-                    <a:lnL w="12700" cap="flat" cmpd="sng" algn="ctr">
-                      <a:solidFill>
-                        <a:schemeClr val="tx1"/>
-                      </a:solidFill>
-                      <a:prstDash val="solid"/>
-                      <a:round/>
-                      <a:headEnd type="none" w="med" len="med"/>
-                      <a:tailEnd type="none" w="med" len="med"/>
-                    </a:lnL>
-                    <a:lnR w="12700" cap="flat" cmpd="sng" algn="ctr">
-                      <a:solidFill>
-                        <a:schemeClr val="tx1"/>
-                      </a:solidFill>
-                      <a:prstDash val="solid"/>
-                      <a:round/>
-                      <a:headEnd type="none" w="med" len="med"/>
-                      <a:tailEnd type="none" w="med" len="med"/>
-                    </a:lnR>
-                    <a:lnT w="12700" cap="flat" cmpd="sng" algn="ctr">
-                      <a:solidFill>
-                        <a:schemeClr val="tx1"/>
-                      </a:solidFill>
-                      <a:prstDash val="solid"/>
-                      <a:round/>
-                      <a:headEnd type="none" w="med" len="med"/>
-                      <a:tailEnd type="none" w="med" len="med"/>
-                    </a:lnT>
-                    <a:lnB w="12700" cap="flat" cmpd="sng" algn="ctr">
-                      <a:solidFill>
-                        <a:schemeClr val="tx1"/>
-                      </a:solidFill>
-                      <a:prstDash val="solid"/>
-                      <a:round/>
-                      <a:headEnd type="none" w="med" len="med"/>
-                      <a:tailEnd type="none" w="med" len="med"/>
-                    </a:lnB>
-                    <a:noFill/>
-                  </a:tcPr>
-                </a:tc>
-                <a:tc>
-                  <a:txBody>
-                    <a:bodyPr/>
-                    <a:lstStyle/>
-                    <a:p>
-                      <a:pPr algn="l" latinLnBrk="1"/>
-                      <a:endParaRPr lang="ko-KR" altLang="en-US" sz="1400" dirty="0">
-                        <a:latin typeface="Noto Sans KR" panose="020B0200000000000000" pitchFamily="50" charset="-127"/>
-                        <a:ea typeface="Noto Sans KR" panose="020B0200000000000000" pitchFamily="50" charset="-127"/>
-                      </a:endParaRPr>
-                    </a:p>
-                  </a:txBody>
-                  <a:tcPr>
-                    <a:lnL w="12700" cap="flat" cmpd="sng" algn="ctr">
-                      <a:solidFill>
-                        <a:schemeClr val="tx1"/>
-                      </a:solidFill>
-                      <a:prstDash val="solid"/>
-                      <a:round/>
-                      <a:headEnd type="none" w="med" len="med"/>
-                      <a:tailEnd type="none" w="med" len="med"/>
-                    </a:lnL>
-                    <a:lnR w="12700" cap="flat" cmpd="sng" algn="ctr">
-                      <a:solidFill>
-                        <a:schemeClr val="tx1"/>
-                      </a:solidFill>
-                      <a:prstDash val="solid"/>
-                      <a:round/>
-                      <a:headEnd type="none" w="med" len="med"/>
-                      <a:tailEnd type="none" w="med" len="med"/>
-                    </a:lnR>
-                    <a:lnT w="12700" cap="flat" cmpd="sng" algn="ctr">
-                      <a:solidFill>
-                        <a:schemeClr val="tx1"/>
-                      </a:solidFill>
-                      <a:prstDash val="solid"/>
-                      <a:round/>
-                      <a:headEnd type="none" w="med" len="med"/>
-                      <a:tailEnd type="none" w="med" len="med"/>
-                    </a:lnT>
-                    <a:lnB w="12700" cap="flat" cmpd="sng" algn="ctr">
-                      <a:solidFill>
-                        <a:schemeClr val="tx1"/>
-                      </a:solidFill>
-                      <a:prstDash val="solid"/>
-                      <a:round/>
-                      <a:headEnd type="none" w="med" len="med"/>
-                      <a:tailEnd type="none" w="med" len="med"/>
-                    </a:lnB>
-                    <a:noFill/>
-                  </a:tcPr>
-                </a:tc>
-                <a:extLst>
-                  <a:ext uri="{0D108BD9-81ED-4DB2-BD59-A6C34878D82A}">
-                    <a16:rowId xmlns:a16="http://schemas.microsoft.com/office/drawing/2014/main" val="163760298"/>
-                  </a:ext>
-                </a:extLst>
-              </a:tr>
-              <a:tr h="355331">
-                <a:tc>
-                  <a:txBody>
-                    <a:bodyPr/>
-                    <a:lstStyle/>
-                    <a:p>
-                      <a:pPr algn="ctr" latinLnBrk="1"/>
-                      <a:r>
-                        <a:rPr lang="en-US" altLang="ko-KR" dirty="0">
-                          <a:latin typeface="Noto Sans KR" panose="020B0200000000000000" pitchFamily="50" charset="-127"/>
-                          <a:ea typeface="Noto Sans KR" panose="020B0200000000000000" pitchFamily="50" charset="-127"/>
-                        </a:rPr>
-                        <a:t>5</a:t>
-                      </a:r>
-                      <a:endParaRPr lang="ko-KR" altLang="en-US" dirty="0">
-                        <a:latin typeface="Noto Sans KR" panose="020B0200000000000000" pitchFamily="50" charset="-127"/>
-                        <a:ea typeface="Noto Sans KR" panose="020B0200000000000000" pitchFamily="50" charset="-127"/>
-                      </a:endParaRPr>
-                    </a:p>
-                  </a:txBody>
-                  <a:tcPr>
-                    <a:lnL w="12700" cap="flat" cmpd="sng" algn="ctr">
-                      <a:solidFill>
-                        <a:schemeClr val="tx1"/>
-                      </a:solidFill>
-                      <a:prstDash val="solid"/>
-                      <a:round/>
-                      <a:headEnd type="none" w="med" len="med"/>
-                      <a:tailEnd type="none" w="med" len="med"/>
-                    </a:lnL>
-                    <a:lnR w="12700" cap="flat" cmpd="sng" algn="ctr">
-                      <a:solidFill>
-                        <a:schemeClr val="tx1"/>
-                      </a:solidFill>
-                      <a:prstDash val="solid"/>
-                      <a:round/>
-                      <a:headEnd type="none" w="med" len="med"/>
-                      <a:tailEnd type="none" w="med" len="med"/>
-                    </a:lnR>
-                    <a:lnT w="12700" cap="flat" cmpd="sng" algn="ctr">
-                      <a:solidFill>
-                        <a:schemeClr val="tx1"/>
-                      </a:solidFill>
-                      <a:prstDash val="solid"/>
-                      <a:round/>
-                      <a:headEnd type="none" w="med" len="med"/>
-                      <a:tailEnd type="none" w="med" len="med"/>
-                    </a:lnT>
-                    <a:lnB w="12700" cap="flat" cmpd="sng" algn="ctr">
-                      <a:solidFill>
-                        <a:schemeClr val="tx1"/>
-                      </a:solidFill>
-                      <a:prstDash val="solid"/>
-                      <a:round/>
-                      <a:headEnd type="none" w="med" len="med"/>
-                      <a:tailEnd type="none" w="med" len="med"/>
-                    </a:lnB>
-                    <a:noFill/>
-                  </a:tcPr>
-                </a:tc>
-                <a:tc>
-                  <a:txBody>
-                    <a:bodyPr/>
-                    <a:lstStyle/>
-                    <a:p>
-                      <a:pPr algn="l" latinLnBrk="1"/>
-                      <a:endParaRPr lang="ko-KR" altLang="en-US" sz="1400" dirty="0">
-                        <a:latin typeface="Noto Sans KR" panose="020B0200000000000000" pitchFamily="50" charset="-127"/>
-                        <a:ea typeface="Noto Sans KR" panose="020B0200000000000000" pitchFamily="50" charset="-127"/>
-                      </a:endParaRPr>
-                    </a:p>
-                  </a:txBody>
-                  <a:tcPr>
-                    <a:lnL w="12700" cap="flat" cmpd="sng" algn="ctr">
-                      <a:solidFill>
-                        <a:schemeClr val="tx1"/>
-                      </a:solidFill>
-                      <a:prstDash val="solid"/>
-                      <a:round/>
-                      <a:headEnd type="none" w="med" len="med"/>
-                      <a:tailEnd type="none" w="med" len="med"/>
-                    </a:lnL>
-                    <a:lnR w="12700" cap="flat" cmpd="sng" algn="ctr">
-                      <a:solidFill>
-                        <a:schemeClr val="tx1"/>
-                      </a:solidFill>
-                      <a:prstDash val="solid"/>
-                      <a:round/>
-                      <a:headEnd type="none" w="med" len="med"/>
-                      <a:tailEnd type="none" w="med" len="med"/>
-                    </a:lnR>
-                    <a:lnT w="12700" cap="flat" cmpd="sng" algn="ctr">
-                      <a:solidFill>
-                        <a:schemeClr val="tx1"/>
-                      </a:solidFill>
-                      <a:prstDash val="solid"/>
-                      <a:round/>
-                      <a:headEnd type="none" w="med" len="med"/>
-                      <a:tailEnd type="none" w="med" len="med"/>
-                    </a:lnT>
-                    <a:lnB w="12700" cap="flat" cmpd="sng" algn="ctr">
-                      <a:solidFill>
-                        <a:schemeClr val="tx1"/>
-                      </a:solidFill>
-                      <a:prstDash val="solid"/>
-                      <a:round/>
-                      <a:headEnd type="none" w="med" len="med"/>
-                      <a:tailEnd type="none" w="med" len="med"/>
-                    </a:lnB>
-                    <a:noFill/>
-                  </a:tcPr>
-                </a:tc>
-                <a:extLst>
-                  <a:ext uri="{0D108BD9-81ED-4DB2-BD59-A6C34878D82A}">
-                    <a16:rowId xmlns:a16="http://schemas.microsoft.com/office/drawing/2014/main" val="1949926814"/>
-                  </a:ext>
-                </a:extLst>
-              </a:tr>
-              <a:tr h="355331">
-                <a:tc>
-                  <a:txBody>
-                    <a:bodyPr/>
-                    <a:lstStyle/>
-                    <a:p>
-                      <a:pPr algn="ctr" latinLnBrk="1"/>
-                      <a:r>
-                        <a:rPr lang="en-US" altLang="ko-KR" dirty="0">
-                          <a:latin typeface="Noto Sans KR" panose="020B0200000000000000" pitchFamily="50" charset="-127"/>
-                          <a:ea typeface="Noto Sans KR" panose="020B0200000000000000" pitchFamily="50" charset="-127"/>
-                        </a:rPr>
-                        <a:t>6</a:t>
-                      </a:r>
-                      <a:endParaRPr lang="ko-KR" altLang="en-US" dirty="0">
-                        <a:latin typeface="Noto Sans KR" panose="020B0200000000000000" pitchFamily="50" charset="-127"/>
-                        <a:ea typeface="Noto Sans KR" panose="020B0200000000000000" pitchFamily="50" charset="-127"/>
-                      </a:endParaRPr>
-                    </a:p>
-                  </a:txBody>
-                  <a:tcPr>
-                    <a:lnL w="12700" cap="flat" cmpd="sng" algn="ctr">
-                      <a:solidFill>
-                        <a:schemeClr val="tx1"/>
-                      </a:solidFill>
-                      <a:prstDash val="solid"/>
-                      <a:round/>
-                      <a:headEnd type="none" w="med" len="med"/>
-                      <a:tailEnd type="none" w="med" len="med"/>
-                    </a:lnL>
-                    <a:lnR w="12700" cap="flat" cmpd="sng" algn="ctr">
-                      <a:solidFill>
-                        <a:schemeClr val="tx1"/>
-                      </a:solidFill>
-                      <a:prstDash val="solid"/>
-                      <a:round/>
-                      <a:headEnd type="none" w="med" len="med"/>
-                      <a:tailEnd type="none" w="med" len="med"/>
-                    </a:lnR>
-                    <a:lnT w="12700" cap="flat" cmpd="sng" algn="ctr">
-                      <a:solidFill>
-                        <a:schemeClr val="tx1"/>
-                      </a:solidFill>
-                      <a:prstDash val="solid"/>
-                      <a:round/>
-                      <a:headEnd type="none" w="med" len="med"/>
-                      <a:tailEnd type="none" w="med" len="med"/>
-                    </a:lnT>
-                    <a:lnB w="12700" cap="flat" cmpd="sng" algn="ctr">
-                      <a:solidFill>
-                        <a:schemeClr val="tx1"/>
-                      </a:solidFill>
-                      <a:prstDash val="solid"/>
-                      <a:round/>
-                      <a:headEnd type="none" w="med" len="med"/>
-                      <a:tailEnd type="none" w="med" len="med"/>
-                    </a:lnB>
-                    <a:noFill/>
-                  </a:tcPr>
-                </a:tc>
-                <a:tc>
-                  <a:txBody>
-                    <a:bodyPr/>
-                    <a:lstStyle/>
-                    <a:p>
-                      <a:pPr algn="l" latinLnBrk="1"/>
-                      <a:endParaRPr lang="ko-KR" altLang="en-US" sz="1400" dirty="0">
-                        <a:latin typeface="Noto Sans KR" panose="020B0200000000000000" pitchFamily="50" charset="-127"/>
-                        <a:ea typeface="Noto Sans KR" panose="020B0200000000000000" pitchFamily="50" charset="-127"/>
-                      </a:endParaRPr>
-                    </a:p>
-                  </a:txBody>
-                  <a:tcPr>
-                    <a:lnL w="12700" cap="flat" cmpd="sng" algn="ctr">
-                      <a:solidFill>
-                        <a:schemeClr val="tx1"/>
-                      </a:solidFill>
-                      <a:prstDash val="solid"/>
-                      <a:round/>
-                      <a:headEnd type="none" w="med" len="med"/>
-                      <a:tailEnd type="none" w="med" len="med"/>
-                    </a:lnL>
-                    <a:lnR w="12700" cap="flat" cmpd="sng" algn="ctr">
-                      <a:solidFill>
-                        <a:schemeClr val="tx1"/>
-                      </a:solidFill>
-                      <a:prstDash val="solid"/>
-                      <a:round/>
-                      <a:headEnd type="none" w="med" len="med"/>
-                      <a:tailEnd type="none" w="med" len="med"/>
-                    </a:lnR>
-                    <a:lnT w="12700" cap="flat" cmpd="sng" algn="ctr">
-                      <a:solidFill>
-                        <a:schemeClr val="tx1"/>
-                      </a:solidFill>
-                      <a:prstDash val="solid"/>
-                      <a:round/>
-                      <a:headEnd type="none" w="med" len="med"/>
-                      <a:tailEnd type="none" w="med" len="med"/>
-                    </a:lnT>
-                    <a:lnB w="12700" cap="flat" cmpd="sng" algn="ctr">
-                      <a:solidFill>
-                        <a:schemeClr val="tx1"/>
-                      </a:solidFill>
-                      <a:prstDash val="solid"/>
-                      <a:round/>
-                      <a:headEnd type="none" w="med" len="med"/>
-                      <a:tailEnd type="none" w="med" len="med"/>
-                    </a:lnB>
-                    <a:noFill/>
-                  </a:tcPr>
-                </a:tc>
-                <a:extLst>
-                  <a:ext uri="{0D108BD9-81ED-4DB2-BD59-A6C34878D82A}">
-                    <a16:rowId xmlns:a16="http://schemas.microsoft.com/office/drawing/2014/main" val="1292618069"/>
-                  </a:ext>
-                </a:extLst>
-              </a:tr>
             </a:tbl>
           </a:graphicData>
         </a:graphic>
@@ -11575,13 +10513,13 @@
           <p:nvPr>
             <p:extLst>
               <p:ext uri="{D42A27DB-BD31-4B8C-83A1-F6EECF244321}">
-                <p14:modId xmlns:p14="http://schemas.microsoft.com/office/powerpoint/2010/main" val="945306114"/>
+                <p14:modId xmlns:p14="http://schemas.microsoft.com/office/powerpoint/2010/main" val="1715761062"/>
               </p:ext>
             </p:extLst>
           </p:nvPr>
         </p:nvGraphicFramePr>
         <p:xfrm>
-          <a:off x="195431" y="256973"/>
+          <a:off x="7698" y="341755"/>
           <a:ext cx="10818319" cy="736600"/>
         </p:xfrm>
         <a:graphic>
@@ -11864,7 +10802,7 @@
                           <a:latin typeface="Noto Sans KR" panose="020B0200000000000000" pitchFamily="50" charset="-127"/>
                           <a:ea typeface="Noto Sans KR" panose="020B0200000000000000" pitchFamily="50" charset="-127"/>
                         </a:rPr>
-                        <a:t>Main-1</a:t>
+                        <a:t>Nav-1</a:t>
                       </a:r>
                       <a:endParaRPr lang="ko-KR" altLang="en-US" b="0" dirty="0">
                         <a:solidFill>
@@ -13192,7 +12130,7 @@
         </p:nvSpPr>
         <p:spPr>
           <a:xfrm>
-            <a:off x="195431" y="1655315"/>
+            <a:off x="150166" y="1652080"/>
             <a:ext cx="1019921" cy="518656"/>
           </a:xfrm>
           <a:prstGeom prst="ellipse">
@@ -13339,13 +12277,13 @@
           <p:nvPr>
             <p:extLst>
               <p:ext uri="{D42A27DB-BD31-4B8C-83A1-F6EECF244321}">
-                <p14:modId xmlns:p14="http://schemas.microsoft.com/office/powerpoint/2010/main" val="278000108"/>
+                <p14:modId xmlns:p14="http://schemas.microsoft.com/office/powerpoint/2010/main" val="2444929204"/>
               </p:ext>
             </p:extLst>
           </p:nvPr>
         </p:nvGraphicFramePr>
         <p:xfrm>
-          <a:off x="195431" y="242901"/>
+          <a:off x="0" y="332981"/>
           <a:ext cx="10818319" cy="736600"/>
         </p:xfrm>
         <a:graphic>
@@ -14438,14 +13376,14 @@
           <p:nvPr>
             <p:extLst>
               <p:ext uri="{D42A27DB-BD31-4B8C-83A1-F6EECF244321}">
-                <p14:modId xmlns:p14="http://schemas.microsoft.com/office/powerpoint/2010/main" val="2946445864"/>
+                <p14:modId xmlns:p14="http://schemas.microsoft.com/office/powerpoint/2010/main" val="1176646530"/>
               </p:ext>
             </p:extLst>
           </p:nvPr>
         </p:nvGraphicFramePr>
         <p:xfrm>
           <a:off x="9593342" y="1515542"/>
-          <a:ext cx="2448492" cy="3474720"/>
+          <a:ext cx="2448492" cy="3322320"/>
         </p:xfrm>
         <a:graphic>
           <a:graphicData uri="http://schemas.openxmlformats.org/drawingml/2006/table">
@@ -15004,6 +13942,27 @@
                           <a:latin typeface="Noto Sans KR" panose="020B0200000000000000" pitchFamily="50" charset="-127"/>
                           <a:ea typeface="Noto Sans KR" panose="020B0200000000000000" pitchFamily="50" charset="-127"/>
                         </a:rPr>
+                        <a:t>. </a:t>
+                      </a:r>
+                      <a:r>
+                        <a:rPr lang="ko-KR" altLang="en-US" sz="1600" dirty="0">
+                          <a:latin typeface="Noto Sans KR" panose="020B0200000000000000" pitchFamily="50" charset="-127"/>
+                          <a:ea typeface="Noto Sans KR" panose="020B0200000000000000" pitchFamily="50" charset="-127"/>
+                        </a:rPr>
+                        <a:t>데이터 출처가 </a:t>
+                      </a:r>
+                      <a:r>
+                        <a:rPr lang="ko-KR" altLang="en-US" sz="1600" dirty="0" err="1">
+                          <a:latin typeface="Noto Sans KR" panose="020B0200000000000000" pitchFamily="50" charset="-127"/>
+                          <a:ea typeface="Noto Sans KR" panose="020B0200000000000000" pitchFamily="50" charset="-127"/>
+                        </a:rPr>
+                        <a:t>적혀있음</a:t>
+                      </a:r>
+                      <a:r>
+                        <a:rPr lang="en-US" altLang="ko-KR" sz="1600" dirty="0">
+                          <a:latin typeface="Noto Sans KR" panose="020B0200000000000000" pitchFamily="50" charset="-127"/>
+                          <a:ea typeface="Noto Sans KR" panose="020B0200000000000000" pitchFamily="50" charset="-127"/>
+                        </a:rPr>
                         <a:t>.</a:t>
                       </a:r>
                       <a:endParaRPr lang="ko-KR" altLang="en-US" sz="1600" dirty="0">
@@ -15055,124 +14014,6 @@
                 <a:extLst>
                   <a:ext uri="{0D108BD9-81ED-4DB2-BD59-A6C34878D82A}">
                     <a16:rowId xmlns:a16="http://schemas.microsoft.com/office/drawing/2014/main" val="1888026692"/>
-                  </a:ext>
-                </a:extLst>
-              </a:tr>
-              <a:tr h="355331">
-                <a:tc>
-                  <a:txBody>
-                    <a:bodyPr/>
-                    <a:lstStyle/>
-                    <a:p>
-                      <a:pPr algn="ctr" latinLnBrk="1"/>
-                      <a:r>
-                        <a:rPr lang="en-US" altLang="ko-KR" dirty="0">
-                          <a:latin typeface="Noto Sans KR" panose="020B0200000000000000" pitchFamily="50" charset="-127"/>
-                          <a:ea typeface="Noto Sans KR" panose="020B0200000000000000" pitchFamily="50" charset="-127"/>
-                        </a:rPr>
-                        <a:t>4</a:t>
-                      </a:r>
-                      <a:endParaRPr lang="ko-KR" altLang="en-US" dirty="0">
-                        <a:latin typeface="Noto Sans KR" panose="020B0200000000000000" pitchFamily="50" charset="-127"/>
-                        <a:ea typeface="Noto Sans KR" panose="020B0200000000000000" pitchFamily="50" charset="-127"/>
-                      </a:endParaRPr>
-                    </a:p>
-                  </a:txBody>
-                  <a:tcPr>
-                    <a:lnL w="12700" cap="flat" cmpd="sng" algn="ctr">
-                      <a:solidFill>
-                        <a:schemeClr val="tx1"/>
-                      </a:solidFill>
-                      <a:prstDash val="solid"/>
-                      <a:round/>
-                      <a:headEnd type="none" w="med" len="med"/>
-                      <a:tailEnd type="none" w="med" len="med"/>
-                    </a:lnL>
-                    <a:lnR w="12700" cap="flat" cmpd="sng" algn="ctr">
-                      <a:solidFill>
-                        <a:schemeClr val="tx1"/>
-                      </a:solidFill>
-                      <a:prstDash val="solid"/>
-                      <a:round/>
-                      <a:headEnd type="none" w="med" len="med"/>
-                      <a:tailEnd type="none" w="med" len="med"/>
-                    </a:lnR>
-                    <a:lnT w="12700" cap="flat" cmpd="sng" algn="ctr">
-                      <a:solidFill>
-                        <a:schemeClr val="tx1"/>
-                      </a:solidFill>
-                      <a:prstDash val="solid"/>
-                      <a:round/>
-                      <a:headEnd type="none" w="med" len="med"/>
-                      <a:tailEnd type="none" w="med" len="med"/>
-                    </a:lnT>
-                    <a:lnB w="12700" cap="flat" cmpd="sng" algn="ctr">
-                      <a:solidFill>
-                        <a:schemeClr val="tx1"/>
-                      </a:solidFill>
-                      <a:prstDash val="solid"/>
-                      <a:round/>
-                      <a:headEnd type="none" w="med" len="med"/>
-                      <a:tailEnd type="none" w="med" len="med"/>
-                    </a:lnB>
-                    <a:noFill/>
-                  </a:tcPr>
-                </a:tc>
-                <a:tc>
-                  <a:txBody>
-                    <a:bodyPr/>
-                    <a:lstStyle/>
-                    <a:p>
-                      <a:pPr algn="ctr" latinLnBrk="1"/>
-                      <a:endParaRPr lang="ko-KR" altLang="en-US" sz="1600" dirty="0">
-                        <a:latin typeface="Noto Sans KR" panose="020B0200000000000000" pitchFamily="50" charset="-127"/>
-                        <a:ea typeface="Noto Sans KR" panose="020B0200000000000000" pitchFamily="50" charset="-127"/>
-                      </a:endParaRPr>
-                    </a:p>
-                  </a:txBody>
-                  <a:tcPr>
-                    <a:lnL w="12700" cap="flat" cmpd="sng" algn="ctr">
-                      <a:solidFill>
-                        <a:schemeClr val="tx1"/>
-                      </a:solidFill>
-                      <a:prstDash val="solid"/>
-                      <a:round/>
-                      <a:headEnd type="none" w="med" len="med"/>
-                      <a:tailEnd type="none" w="med" len="med"/>
-                    </a:lnL>
-                    <a:lnR w="12700" cap="flat" cmpd="sng" algn="ctr">
-                      <a:solidFill>
-                        <a:schemeClr val="tx1"/>
-                      </a:solidFill>
-                      <a:prstDash val="solid"/>
-                      <a:round/>
-                      <a:headEnd type="none" w="med" len="med"/>
-                      <a:tailEnd type="none" w="med" len="med"/>
-                    </a:lnR>
-                    <a:lnT w="12700" cap="flat" cmpd="sng" algn="ctr">
-                      <a:solidFill>
-                        <a:schemeClr val="tx1"/>
-                      </a:solidFill>
-                      <a:prstDash val="solid"/>
-                      <a:round/>
-                      <a:headEnd type="none" w="med" len="med"/>
-                      <a:tailEnd type="none" w="med" len="med"/>
-                    </a:lnT>
-                    <a:lnB w="12700" cap="flat" cmpd="sng" algn="ctr">
-                      <a:solidFill>
-                        <a:schemeClr val="tx1"/>
-                      </a:solidFill>
-                      <a:prstDash val="solid"/>
-                      <a:round/>
-                      <a:headEnd type="none" w="med" len="med"/>
-                      <a:tailEnd type="none" w="med" len="med"/>
-                    </a:lnB>
-                    <a:noFill/>
-                  </a:tcPr>
-                </a:tc>
-                <a:extLst>
-                  <a:ext uri="{0D108BD9-81ED-4DB2-BD59-A6C34878D82A}">
-                    <a16:rowId xmlns:a16="http://schemas.microsoft.com/office/drawing/2014/main" val="163760298"/>
                   </a:ext>
                 </a:extLst>
               </a:tr>
@@ -15952,7 +14793,7 @@
         </p:nvSpPr>
         <p:spPr>
           <a:xfrm>
-            <a:off x="1594898" y="6202066"/>
+            <a:off x="395883" y="6159564"/>
             <a:ext cx="478394" cy="478394"/>
           </a:xfrm>
           <a:prstGeom prst="ellipse">
@@ -16023,7 +14864,7 @@
         <p:spPr>
           <a:xfrm>
             <a:off x="555226" y="3769307"/>
-            <a:ext cx="4728436" cy="1554272"/>
+            <a:ext cx="4728436" cy="1492716"/>
           </a:xfrm>
           <a:prstGeom prst="rect">
             <a:avLst/>
@@ -16077,12 +14918,14 @@
           </a:p>
           <a:p>
             <a:r>
-              <a:rPr lang="en-US" altLang="ko-KR" b="1" dirty="0">
-                <a:latin typeface="Noto Sans KR" panose="020B0200000000000000" pitchFamily="50" charset="-127"/>
-                <a:ea typeface="Noto Sans KR" panose="020B0200000000000000" pitchFamily="50" charset="-127"/>
-                <a:cs typeface="Arial" panose="020B0604020202020204" pitchFamily="34" charset="0"/>
+              <a:rPr lang="en-US" altLang="ko-KR" sz="1400" b="1" i="0" dirty="0">
+                <a:solidFill>
+                  <a:srgbClr val="0A0A0A"/>
+                </a:solidFill>
+                <a:effectLst/>
+                <a:latin typeface="Arial" panose="020B0604020202020204" pitchFamily="34" charset="0"/>
               </a:rPr>
-              <a:t>Sodium      </a:t>
+              <a:t>Natrium          </a:t>
             </a:r>
             <a:r>
               <a:rPr lang="en-US" altLang="ko-KR" sz="1400" b="1" dirty="0">
@@ -16155,7 +14998,7 @@
         </p:nvSpPr>
         <p:spPr>
           <a:xfrm>
-            <a:off x="195431" y="1655315"/>
+            <a:off x="150166" y="1641534"/>
             <a:ext cx="1019921" cy="518656"/>
           </a:xfrm>
           <a:prstGeom prst="ellipse">
@@ -16888,13 +15731,13 @@
           <p:nvPr>
             <p:extLst>
               <p:ext uri="{D42A27DB-BD31-4B8C-83A1-F6EECF244321}">
-                <p14:modId xmlns:p14="http://schemas.microsoft.com/office/powerpoint/2010/main" val="2675873282"/>
+                <p14:modId xmlns:p14="http://schemas.microsoft.com/office/powerpoint/2010/main" val="133984014"/>
               </p:ext>
             </p:extLst>
           </p:nvPr>
         </p:nvGraphicFramePr>
         <p:xfrm>
-          <a:off x="195431" y="256973"/>
+          <a:off x="0" y="342607"/>
           <a:ext cx="10818319" cy="736600"/>
         </p:xfrm>
         <a:graphic>
@@ -17987,14 +16830,14 @@
           <p:nvPr>
             <p:extLst>
               <p:ext uri="{D42A27DB-BD31-4B8C-83A1-F6EECF244321}">
-                <p14:modId xmlns:p14="http://schemas.microsoft.com/office/powerpoint/2010/main" val="3574753666"/>
+                <p14:modId xmlns:p14="http://schemas.microsoft.com/office/powerpoint/2010/main" val="3612536002"/>
               </p:ext>
             </p:extLst>
           </p:nvPr>
         </p:nvGraphicFramePr>
         <p:xfrm>
           <a:off x="9593342" y="1515542"/>
-          <a:ext cx="2448492" cy="2255520"/>
+          <a:ext cx="2448492" cy="1889760"/>
         </p:xfrm>
         <a:graphic>
           <a:graphicData uri="http://schemas.openxmlformats.org/drawingml/2006/table">
@@ -18024,7 +16867,7 @@
                     <a:bodyPr/>
                     <a:lstStyle/>
                     <a:p>
-                      <a:pPr algn="l" latinLnBrk="1"/>
+                      <a:pPr algn="ctr" latinLnBrk="1"/>
                       <a:r>
                         <a:rPr lang="en-US" altLang="ko-KR" b="0" dirty="0">
                           <a:solidFill>
@@ -18515,124 +17358,6 @@
                 <a:extLst>
                   <a:ext uri="{0D108BD9-81ED-4DB2-BD59-A6C34878D82A}">
                     <a16:rowId xmlns:a16="http://schemas.microsoft.com/office/drawing/2014/main" val="1888026692"/>
-                  </a:ext>
-                </a:extLst>
-              </a:tr>
-              <a:tr h="355331">
-                <a:tc>
-                  <a:txBody>
-                    <a:bodyPr/>
-                    <a:lstStyle/>
-                    <a:p>
-                      <a:pPr algn="l" latinLnBrk="1"/>
-                      <a:r>
-                        <a:rPr lang="en-US" altLang="ko-KR" dirty="0">
-                          <a:latin typeface="Noto Sans KR" panose="020B0200000000000000" pitchFamily="50" charset="-127"/>
-                          <a:ea typeface="Noto Sans KR" panose="020B0200000000000000" pitchFamily="50" charset="-127"/>
-                        </a:rPr>
-                        <a:t>4</a:t>
-                      </a:r>
-                      <a:endParaRPr lang="ko-KR" altLang="en-US" dirty="0">
-                        <a:latin typeface="Noto Sans KR" panose="020B0200000000000000" pitchFamily="50" charset="-127"/>
-                        <a:ea typeface="Noto Sans KR" panose="020B0200000000000000" pitchFamily="50" charset="-127"/>
-                      </a:endParaRPr>
-                    </a:p>
-                  </a:txBody>
-                  <a:tcPr>
-                    <a:lnL w="12700" cap="flat" cmpd="sng" algn="ctr">
-                      <a:solidFill>
-                        <a:schemeClr val="tx1"/>
-                      </a:solidFill>
-                      <a:prstDash val="solid"/>
-                      <a:round/>
-                      <a:headEnd type="none" w="med" len="med"/>
-                      <a:tailEnd type="none" w="med" len="med"/>
-                    </a:lnL>
-                    <a:lnR w="12700" cap="flat" cmpd="sng" algn="ctr">
-                      <a:solidFill>
-                        <a:schemeClr val="tx1"/>
-                      </a:solidFill>
-                      <a:prstDash val="solid"/>
-                      <a:round/>
-                      <a:headEnd type="none" w="med" len="med"/>
-                      <a:tailEnd type="none" w="med" len="med"/>
-                    </a:lnR>
-                    <a:lnT w="12700" cap="flat" cmpd="sng" algn="ctr">
-                      <a:solidFill>
-                        <a:schemeClr val="tx1"/>
-                      </a:solidFill>
-                      <a:prstDash val="solid"/>
-                      <a:round/>
-                      <a:headEnd type="none" w="med" len="med"/>
-                      <a:tailEnd type="none" w="med" len="med"/>
-                    </a:lnT>
-                    <a:lnB w="12700" cap="flat" cmpd="sng" algn="ctr">
-                      <a:solidFill>
-                        <a:schemeClr val="tx1"/>
-                      </a:solidFill>
-                      <a:prstDash val="solid"/>
-                      <a:round/>
-                      <a:headEnd type="none" w="med" len="med"/>
-                      <a:tailEnd type="none" w="med" len="med"/>
-                    </a:lnB>
-                    <a:noFill/>
-                  </a:tcPr>
-                </a:tc>
-                <a:tc>
-                  <a:txBody>
-                    <a:bodyPr/>
-                    <a:lstStyle/>
-                    <a:p>
-                      <a:pPr algn="l" latinLnBrk="1"/>
-                      <a:endParaRPr lang="ko-KR" altLang="en-US" dirty="0">
-                        <a:latin typeface="Noto Sans KR" panose="020B0200000000000000" pitchFamily="50" charset="-127"/>
-                        <a:ea typeface="Noto Sans KR" panose="020B0200000000000000" pitchFamily="50" charset="-127"/>
-                      </a:endParaRPr>
-                    </a:p>
-                  </a:txBody>
-                  <a:tcPr>
-                    <a:lnL w="12700" cap="flat" cmpd="sng" algn="ctr">
-                      <a:solidFill>
-                        <a:schemeClr val="tx1"/>
-                      </a:solidFill>
-                      <a:prstDash val="solid"/>
-                      <a:round/>
-                      <a:headEnd type="none" w="med" len="med"/>
-                      <a:tailEnd type="none" w="med" len="med"/>
-                    </a:lnL>
-                    <a:lnR w="12700" cap="flat" cmpd="sng" algn="ctr">
-                      <a:solidFill>
-                        <a:schemeClr val="tx1"/>
-                      </a:solidFill>
-                      <a:prstDash val="solid"/>
-                      <a:round/>
-                      <a:headEnd type="none" w="med" len="med"/>
-                      <a:tailEnd type="none" w="med" len="med"/>
-                    </a:lnR>
-                    <a:lnT w="12700" cap="flat" cmpd="sng" algn="ctr">
-                      <a:solidFill>
-                        <a:schemeClr val="tx1"/>
-                      </a:solidFill>
-                      <a:prstDash val="solid"/>
-                      <a:round/>
-                      <a:headEnd type="none" w="med" len="med"/>
-                      <a:tailEnd type="none" w="med" len="med"/>
-                    </a:lnT>
-                    <a:lnB w="12700" cap="flat" cmpd="sng" algn="ctr">
-                      <a:solidFill>
-                        <a:schemeClr val="tx1"/>
-                      </a:solidFill>
-                      <a:prstDash val="solid"/>
-                      <a:round/>
-                      <a:headEnd type="none" w="med" len="med"/>
-                      <a:tailEnd type="none" w="med" len="med"/>
-                    </a:lnB>
-                    <a:noFill/>
-                  </a:tcPr>
-                </a:tc>
-                <a:extLst>
-                  <a:ext uri="{0D108BD9-81ED-4DB2-BD59-A6C34878D82A}">
-                    <a16:rowId xmlns:a16="http://schemas.microsoft.com/office/drawing/2014/main" val="163760298"/>
                   </a:ext>
                 </a:extLst>
               </a:tr>
@@ -18684,7 +17409,7 @@
         </p:nvSpPr>
         <p:spPr>
           <a:xfrm>
-            <a:off x="195431" y="1655315"/>
+            <a:off x="150166" y="1641534"/>
             <a:ext cx="1019921" cy="518656"/>
           </a:xfrm>
           <a:prstGeom prst="ellipse">
@@ -19117,14 +17842,14 @@
           <p:nvPr>
             <p:extLst>
               <p:ext uri="{D42A27DB-BD31-4B8C-83A1-F6EECF244321}">
-                <p14:modId xmlns:p14="http://schemas.microsoft.com/office/powerpoint/2010/main" val="1509840947"/>
+                <p14:modId xmlns:p14="http://schemas.microsoft.com/office/powerpoint/2010/main" val="3070089067"/>
               </p:ext>
             </p:extLst>
           </p:nvPr>
         </p:nvGraphicFramePr>
         <p:xfrm>
           <a:off x="9593342" y="1515542"/>
-          <a:ext cx="2448492" cy="1828800"/>
+          <a:ext cx="2448492" cy="731520"/>
         </p:xfrm>
         <a:graphic>
           <a:graphicData uri="http://schemas.openxmlformats.org/drawingml/2006/table">
@@ -19392,360 +18117,6 @@
                   </a:ext>
                 </a:extLst>
               </a:tr>
-              <a:tr h="355331">
-                <a:tc>
-                  <a:txBody>
-                    <a:bodyPr/>
-                    <a:lstStyle/>
-                    <a:p>
-                      <a:pPr algn="ctr" latinLnBrk="1"/>
-                      <a:r>
-                        <a:rPr lang="en-US" altLang="ko-KR" dirty="0">
-                          <a:latin typeface="Noto Sans KR" panose="020B0200000000000000" pitchFamily="50" charset="-127"/>
-                          <a:ea typeface="Noto Sans KR" panose="020B0200000000000000" pitchFamily="50" charset="-127"/>
-                        </a:rPr>
-                        <a:t>2</a:t>
-                      </a:r>
-                      <a:endParaRPr lang="ko-KR" altLang="en-US" dirty="0">
-                        <a:latin typeface="Noto Sans KR" panose="020B0200000000000000" pitchFamily="50" charset="-127"/>
-                        <a:ea typeface="Noto Sans KR" panose="020B0200000000000000" pitchFamily="50" charset="-127"/>
-                      </a:endParaRPr>
-                    </a:p>
-                  </a:txBody>
-                  <a:tcPr>
-                    <a:lnL w="12700" cap="flat" cmpd="sng" algn="ctr">
-                      <a:solidFill>
-                        <a:schemeClr val="tx1"/>
-                      </a:solidFill>
-                      <a:prstDash val="solid"/>
-                      <a:round/>
-                      <a:headEnd type="none" w="med" len="med"/>
-                      <a:tailEnd type="none" w="med" len="med"/>
-                    </a:lnL>
-                    <a:lnR w="12700" cap="flat" cmpd="sng" algn="ctr">
-                      <a:solidFill>
-                        <a:schemeClr val="tx1"/>
-                      </a:solidFill>
-                      <a:prstDash val="solid"/>
-                      <a:round/>
-                      <a:headEnd type="none" w="med" len="med"/>
-                      <a:tailEnd type="none" w="med" len="med"/>
-                    </a:lnR>
-                    <a:lnT w="12700" cap="flat" cmpd="sng" algn="ctr">
-                      <a:solidFill>
-                        <a:schemeClr val="tx1"/>
-                      </a:solidFill>
-                      <a:prstDash val="solid"/>
-                      <a:round/>
-                      <a:headEnd type="none" w="med" len="med"/>
-                      <a:tailEnd type="none" w="med" len="med"/>
-                    </a:lnT>
-                    <a:lnB w="12700" cap="flat" cmpd="sng" algn="ctr">
-                      <a:solidFill>
-                        <a:schemeClr val="tx1"/>
-                      </a:solidFill>
-                      <a:prstDash val="solid"/>
-                      <a:round/>
-                      <a:headEnd type="none" w="med" len="med"/>
-                      <a:tailEnd type="none" w="med" len="med"/>
-                    </a:lnB>
-                    <a:noFill/>
-                  </a:tcPr>
-                </a:tc>
-                <a:tc>
-                  <a:txBody>
-                    <a:bodyPr/>
-                    <a:lstStyle/>
-                    <a:p>
-                      <a:pPr algn="l" latinLnBrk="1"/>
-                      <a:endParaRPr lang="ko-KR" altLang="en-US" sz="1400" dirty="0">
-                        <a:latin typeface="Noto Sans KR" panose="020B0200000000000000" pitchFamily="50" charset="-127"/>
-                        <a:ea typeface="Noto Sans KR" panose="020B0200000000000000" pitchFamily="50" charset="-127"/>
-                      </a:endParaRPr>
-                    </a:p>
-                  </a:txBody>
-                  <a:tcPr>
-                    <a:lnL w="12700" cap="flat" cmpd="sng" algn="ctr">
-                      <a:solidFill>
-                        <a:schemeClr val="tx1"/>
-                      </a:solidFill>
-                      <a:prstDash val="solid"/>
-                      <a:round/>
-                      <a:headEnd type="none" w="med" len="med"/>
-                      <a:tailEnd type="none" w="med" len="med"/>
-                    </a:lnL>
-                    <a:lnR w="12700" cap="flat" cmpd="sng" algn="ctr">
-                      <a:solidFill>
-                        <a:schemeClr val="tx1"/>
-                      </a:solidFill>
-                      <a:prstDash val="solid"/>
-                      <a:round/>
-                      <a:headEnd type="none" w="med" len="med"/>
-                      <a:tailEnd type="none" w="med" len="med"/>
-                    </a:lnR>
-                    <a:lnT w="12700" cap="flat" cmpd="sng" algn="ctr">
-                      <a:solidFill>
-                        <a:schemeClr val="tx1"/>
-                      </a:solidFill>
-                      <a:prstDash val="solid"/>
-                      <a:round/>
-                      <a:headEnd type="none" w="med" len="med"/>
-                      <a:tailEnd type="none" w="med" len="med"/>
-                    </a:lnT>
-                    <a:lnB w="12700" cap="flat" cmpd="sng" algn="ctr">
-                      <a:solidFill>
-                        <a:schemeClr val="tx1"/>
-                      </a:solidFill>
-                      <a:prstDash val="solid"/>
-                      <a:round/>
-                      <a:headEnd type="none" w="med" len="med"/>
-                      <a:tailEnd type="none" w="med" len="med"/>
-                    </a:lnB>
-                    <a:noFill/>
-                  </a:tcPr>
-                </a:tc>
-                <a:extLst>
-                  <a:ext uri="{0D108BD9-81ED-4DB2-BD59-A6C34878D82A}">
-                    <a16:rowId xmlns:a16="http://schemas.microsoft.com/office/drawing/2014/main" val="2175718920"/>
-                  </a:ext>
-                </a:extLst>
-              </a:tr>
-              <a:tr h="355331">
-                <a:tc>
-                  <a:txBody>
-                    <a:bodyPr/>
-                    <a:lstStyle/>
-                    <a:p>
-                      <a:pPr algn="ctr" latinLnBrk="1"/>
-                      <a:r>
-                        <a:rPr lang="en-US" altLang="ko-KR" dirty="0">
-                          <a:latin typeface="Noto Sans KR" panose="020B0200000000000000" pitchFamily="50" charset="-127"/>
-                          <a:ea typeface="Noto Sans KR" panose="020B0200000000000000" pitchFamily="50" charset="-127"/>
-                        </a:rPr>
-                        <a:t>3</a:t>
-                      </a:r>
-                      <a:endParaRPr lang="ko-KR" altLang="en-US" dirty="0">
-                        <a:latin typeface="Noto Sans KR" panose="020B0200000000000000" pitchFamily="50" charset="-127"/>
-                        <a:ea typeface="Noto Sans KR" panose="020B0200000000000000" pitchFamily="50" charset="-127"/>
-                      </a:endParaRPr>
-                    </a:p>
-                  </a:txBody>
-                  <a:tcPr>
-                    <a:lnL w="12700" cap="flat" cmpd="sng" algn="ctr">
-                      <a:solidFill>
-                        <a:schemeClr val="tx1"/>
-                      </a:solidFill>
-                      <a:prstDash val="solid"/>
-                      <a:round/>
-                      <a:headEnd type="none" w="med" len="med"/>
-                      <a:tailEnd type="none" w="med" len="med"/>
-                    </a:lnL>
-                    <a:lnR w="12700" cap="flat" cmpd="sng" algn="ctr">
-                      <a:solidFill>
-                        <a:schemeClr val="tx1"/>
-                      </a:solidFill>
-                      <a:prstDash val="solid"/>
-                      <a:round/>
-                      <a:headEnd type="none" w="med" len="med"/>
-                      <a:tailEnd type="none" w="med" len="med"/>
-                    </a:lnR>
-                    <a:lnT w="12700" cap="flat" cmpd="sng" algn="ctr">
-                      <a:solidFill>
-                        <a:schemeClr val="tx1"/>
-                      </a:solidFill>
-                      <a:prstDash val="solid"/>
-                      <a:round/>
-                      <a:headEnd type="none" w="med" len="med"/>
-                      <a:tailEnd type="none" w="med" len="med"/>
-                    </a:lnT>
-                    <a:lnB w="12700" cap="flat" cmpd="sng" algn="ctr">
-                      <a:solidFill>
-                        <a:schemeClr val="tx1"/>
-                      </a:solidFill>
-                      <a:prstDash val="solid"/>
-                      <a:round/>
-                      <a:headEnd type="none" w="med" len="med"/>
-                      <a:tailEnd type="none" w="med" len="med"/>
-                    </a:lnB>
-                    <a:noFill/>
-                  </a:tcPr>
-                </a:tc>
-                <a:tc>
-                  <a:txBody>
-                    <a:bodyPr/>
-                    <a:lstStyle/>
-                    <a:p>
-                      <a:pPr algn="l" latinLnBrk="1"/>
-                      <a:endParaRPr lang="ko-KR" altLang="en-US" sz="1400" dirty="0">
-                        <a:latin typeface="Noto Sans KR" panose="020B0200000000000000" pitchFamily="50" charset="-127"/>
-                        <a:ea typeface="Noto Sans KR" panose="020B0200000000000000" pitchFamily="50" charset="-127"/>
-                      </a:endParaRPr>
-                    </a:p>
-                  </a:txBody>
-                  <a:tcPr>
-                    <a:lnL w="12700" cap="flat" cmpd="sng" algn="ctr">
-                      <a:solidFill>
-                        <a:schemeClr val="tx1"/>
-                      </a:solidFill>
-                      <a:prstDash val="solid"/>
-                      <a:round/>
-                      <a:headEnd type="none" w="med" len="med"/>
-                      <a:tailEnd type="none" w="med" len="med"/>
-                    </a:lnL>
-                    <a:lnR w="12700" cap="flat" cmpd="sng" algn="ctr">
-                      <a:solidFill>
-                        <a:schemeClr val="tx1"/>
-                      </a:solidFill>
-                      <a:prstDash val="solid"/>
-                      <a:round/>
-                      <a:headEnd type="none" w="med" len="med"/>
-                      <a:tailEnd type="none" w="med" len="med"/>
-                    </a:lnR>
-                    <a:lnT w="12700" cap="flat" cmpd="sng" algn="ctr">
-                      <a:solidFill>
-                        <a:schemeClr val="tx1"/>
-                      </a:solidFill>
-                      <a:prstDash val="solid"/>
-                      <a:round/>
-                      <a:headEnd type="none" w="med" len="med"/>
-                      <a:tailEnd type="none" w="med" len="med"/>
-                    </a:lnT>
-                    <a:lnB w="12700" cap="flat" cmpd="sng" algn="ctr">
-                      <a:solidFill>
-                        <a:schemeClr val="tx1"/>
-                      </a:solidFill>
-                      <a:prstDash val="solid"/>
-                      <a:round/>
-                      <a:headEnd type="none" w="med" len="med"/>
-                      <a:tailEnd type="none" w="med" len="med"/>
-                    </a:lnB>
-                    <a:noFill/>
-                  </a:tcPr>
-                </a:tc>
-                <a:extLst>
-                  <a:ext uri="{0D108BD9-81ED-4DB2-BD59-A6C34878D82A}">
-                    <a16:rowId xmlns:a16="http://schemas.microsoft.com/office/drawing/2014/main" val="1888026692"/>
-                  </a:ext>
-                </a:extLst>
-              </a:tr>
-              <a:tr h="355331">
-                <a:tc>
-                  <a:txBody>
-                    <a:bodyPr/>
-                    <a:lstStyle/>
-                    <a:p>
-                      <a:pPr algn="ctr" latinLnBrk="1"/>
-                      <a:r>
-                        <a:rPr lang="en-US" altLang="ko-KR" dirty="0">
-                          <a:latin typeface="Noto Sans KR" panose="020B0200000000000000" pitchFamily="50" charset="-127"/>
-                          <a:ea typeface="Noto Sans KR" panose="020B0200000000000000" pitchFamily="50" charset="-127"/>
-                        </a:rPr>
-                        <a:t>4</a:t>
-                      </a:r>
-                      <a:endParaRPr lang="ko-KR" altLang="en-US" dirty="0">
-                        <a:latin typeface="Noto Sans KR" panose="020B0200000000000000" pitchFamily="50" charset="-127"/>
-                        <a:ea typeface="Noto Sans KR" panose="020B0200000000000000" pitchFamily="50" charset="-127"/>
-                      </a:endParaRPr>
-                    </a:p>
-                  </a:txBody>
-                  <a:tcPr>
-                    <a:lnL w="12700" cap="flat" cmpd="sng" algn="ctr">
-                      <a:solidFill>
-                        <a:schemeClr val="tx1"/>
-                      </a:solidFill>
-                      <a:prstDash val="solid"/>
-                      <a:round/>
-                      <a:headEnd type="none" w="med" len="med"/>
-                      <a:tailEnd type="none" w="med" len="med"/>
-                    </a:lnL>
-                    <a:lnR w="12700" cap="flat" cmpd="sng" algn="ctr">
-                      <a:solidFill>
-                        <a:schemeClr val="tx1"/>
-                      </a:solidFill>
-                      <a:prstDash val="solid"/>
-                      <a:round/>
-                      <a:headEnd type="none" w="med" len="med"/>
-                      <a:tailEnd type="none" w="med" len="med"/>
-                    </a:lnR>
-                    <a:lnT w="12700" cap="flat" cmpd="sng" algn="ctr">
-                      <a:solidFill>
-                        <a:schemeClr val="tx1"/>
-                      </a:solidFill>
-                      <a:prstDash val="solid"/>
-                      <a:round/>
-                      <a:headEnd type="none" w="med" len="med"/>
-                      <a:tailEnd type="none" w="med" len="med"/>
-                    </a:lnT>
-                    <a:lnB w="12700" cap="flat" cmpd="sng" algn="ctr">
-                      <a:solidFill>
-                        <a:schemeClr val="tx1"/>
-                      </a:solidFill>
-                      <a:prstDash val="solid"/>
-                      <a:round/>
-                      <a:headEnd type="none" w="med" len="med"/>
-                      <a:tailEnd type="none" w="med" len="med"/>
-                    </a:lnB>
-                    <a:noFill/>
-                  </a:tcPr>
-                </a:tc>
-                <a:tc>
-                  <a:txBody>
-                    <a:bodyPr/>
-                    <a:lstStyle/>
-                    <a:p>
-                      <a:pPr algn="l" latinLnBrk="1"/>
-                      <a:endParaRPr lang="ko-KR" altLang="en-US" sz="1400" dirty="0">
-                        <a:latin typeface="Noto Sans KR" panose="020B0200000000000000" pitchFamily="50" charset="-127"/>
-                        <a:ea typeface="Noto Sans KR" panose="020B0200000000000000" pitchFamily="50" charset="-127"/>
-                      </a:endParaRPr>
-                    </a:p>
-                  </a:txBody>
-                  <a:tcPr>
-                    <a:lnL w="12700" cap="flat" cmpd="sng" algn="ctr">
-                      <a:solidFill>
-                        <a:schemeClr val="tx1"/>
-                      </a:solidFill>
-                      <a:prstDash val="solid"/>
-                      <a:round/>
-                      <a:headEnd type="none" w="med" len="med"/>
-                      <a:tailEnd type="none" w="med" len="med"/>
-                    </a:lnL>
-                    <a:lnR w="12700" cap="flat" cmpd="sng" algn="ctr">
-                      <a:solidFill>
-                        <a:schemeClr val="tx1"/>
-                      </a:solidFill>
-                      <a:prstDash val="solid"/>
-                      <a:round/>
-                      <a:headEnd type="none" w="med" len="med"/>
-                      <a:tailEnd type="none" w="med" len="med"/>
-                    </a:lnR>
-                    <a:lnT w="12700" cap="flat" cmpd="sng" algn="ctr">
-                      <a:solidFill>
-                        <a:schemeClr val="tx1"/>
-                      </a:solidFill>
-                      <a:prstDash val="solid"/>
-                      <a:round/>
-                      <a:headEnd type="none" w="med" len="med"/>
-                      <a:tailEnd type="none" w="med" len="med"/>
-                    </a:lnT>
-                    <a:lnB w="12700" cap="flat" cmpd="sng" algn="ctr">
-                      <a:solidFill>
-                        <a:schemeClr val="tx1"/>
-                      </a:solidFill>
-                      <a:prstDash val="solid"/>
-                      <a:round/>
-                      <a:headEnd type="none" w="med" len="med"/>
-                      <a:tailEnd type="none" w="med" len="med"/>
-                    </a:lnB>
-                    <a:noFill/>
-                  </a:tcPr>
-                </a:tc>
-                <a:extLst>
-                  <a:ext uri="{0D108BD9-81ED-4DB2-BD59-A6C34878D82A}">
-                    <a16:rowId xmlns:a16="http://schemas.microsoft.com/office/drawing/2014/main" val="163760298"/>
-                  </a:ext>
-                </a:extLst>
-              </a:tr>
             </a:tbl>
           </a:graphicData>
         </a:graphic>
@@ -19765,13 +18136,13 @@
           <p:nvPr>
             <p:extLst>
               <p:ext uri="{D42A27DB-BD31-4B8C-83A1-F6EECF244321}">
-                <p14:modId xmlns:p14="http://schemas.microsoft.com/office/powerpoint/2010/main" val="1892749393"/>
+                <p14:modId xmlns:p14="http://schemas.microsoft.com/office/powerpoint/2010/main" val="2090940990"/>
               </p:ext>
             </p:extLst>
           </p:nvPr>
         </p:nvGraphicFramePr>
         <p:xfrm>
-          <a:off x="195431" y="256973"/>
+          <a:off x="0" y="326733"/>
           <a:ext cx="10818319" cy="736600"/>
         </p:xfrm>
         <a:graphic>
@@ -21460,7 +19831,7 @@
         </p:nvSpPr>
         <p:spPr>
           <a:xfrm>
-            <a:off x="1592258" y="4369696"/>
+            <a:off x="701230" y="4621926"/>
             <a:ext cx="478394" cy="478394"/>
           </a:xfrm>
           <a:prstGeom prst="ellipse">
@@ -21530,7 +19901,7 @@
         </p:nvSpPr>
         <p:spPr>
           <a:xfrm>
-            <a:off x="1776342" y="3483446"/>
+            <a:off x="705482" y="3659990"/>
             <a:ext cx="478394" cy="478394"/>
           </a:xfrm>
           <a:prstGeom prst="ellipse">
@@ -21600,8 +19971,8 @@
         </p:nvSpPr>
         <p:spPr>
           <a:xfrm>
-            <a:off x="2070652" y="2920640"/>
-            <a:ext cx="6056001" cy="3854901"/>
+            <a:off x="1006457" y="2878242"/>
+            <a:ext cx="7712426" cy="3854901"/>
           </a:xfrm>
           <a:prstGeom prst="rect">
             <a:avLst/>
@@ -21679,7 +20050,7 @@
                 <a:latin typeface="Noto Sans KR" panose="020B0200000000000000" pitchFamily="50" charset="-127"/>
                 <a:ea typeface="Noto Sans KR" panose="020B0200000000000000" pitchFamily="50" charset="-127"/>
               </a:rPr>
-              <a:t>Nutrient: </a:t>
+              <a:t>Nutrient</a:t>
             </a:r>
           </a:p>
           <a:p>
@@ -21698,7 +20069,7 @@
                 <a:latin typeface="Noto Sans KR" panose="020B0200000000000000" pitchFamily="50" charset="-127"/>
                 <a:ea typeface="Noto Sans KR" panose="020B0200000000000000" pitchFamily="50" charset="-127"/>
               </a:rPr>
-              <a:t>Carbs	     Protein           Fat                Sugar</a:t>
+              <a:t>Carbs:	              Protein:                        Fat :                          Sugar:</a:t>
             </a:r>
           </a:p>
           <a:p>
@@ -21730,12 +20101,22 @@
           </a:p>
           <a:p>
             <a:r>
+              <a:rPr lang="en-US" altLang="ko-KR" b="1" i="0" dirty="0">
+                <a:solidFill>
+                  <a:srgbClr val="0A0A0A"/>
+                </a:solidFill>
+                <a:effectLst/>
+                <a:latin typeface="Arial" panose="020B0604020202020204" pitchFamily="34" charset="0"/>
+              </a:rPr>
+              <a:t>Natrium</a:t>
+            </a:r>
+            <a:r>
               <a:rPr lang="en-US" altLang="ko-KR" b="1" dirty="0">
                 <a:latin typeface="Noto Sans KR" panose="020B0200000000000000" pitchFamily="50" charset="-127"/>
                 <a:ea typeface="Noto Sans KR" panose="020B0200000000000000" pitchFamily="50" charset="-127"/>
                 <a:cs typeface="Arial" panose="020B0604020202020204" pitchFamily="34" charset="0"/>
               </a:rPr>
-              <a:t>Sodium      </a:t>
+              <a:t>:                </a:t>
             </a:r>
             <a:r>
               <a:rPr lang="en-US" altLang="ko-KR" sz="1800" b="1" dirty="0">
@@ -21743,7 +20124,18 @@
                 <a:ea typeface="Noto Sans KR" panose="020B0200000000000000" pitchFamily="50" charset="-127"/>
                 <a:cs typeface="Arial" panose="020B0604020202020204" pitchFamily="34" charset="0"/>
               </a:rPr>
-              <a:t>Cholesterol        </a:t>
+              <a:t>Cholesterol:              </a:t>
+            </a:r>
+            <a:r>
+              <a:rPr lang="en-US" altLang="ko-KR" b="1" dirty="0">
+                <a:solidFill>
+                  <a:srgbClr val="0A0A0A"/>
+                </a:solidFill>
+                <a:latin typeface="Noto Sans KR" panose="020B0200000000000000" pitchFamily="50" charset="-127"/>
+                <a:ea typeface="Noto Sans KR" panose="020B0200000000000000" pitchFamily="50" charset="-127"/>
+                <a:cs typeface="Arial" panose="020B0604020202020204" pitchFamily="34" charset="0"/>
+              </a:rPr>
+              <a:t>S</a:t>
             </a:r>
             <a:r>
               <a:rPr lang="en-US" altLang="ko-KR" sz="1800" b="1" i="0" dirty="0">
@@ -21754,7 +20146,51 @@
                 <a:latin typeface="Noto Sans KR" panose="020B0200000000000000" pitchFamily="50" charset="-127"/>
                 <a:ea typeface="Noto Sans KR" panose="020B0200000000000000" pitchFamily="50" charset="-127"/>
               </a:rPr>
-              <a:t>saturated          Dietary 				          fat                    fiber</a:t>
+              <a:t>aturated</a:t>
+            </a:r>
+            <a:r>
+              <a:rPr lang="en-US" altLang="ko-KR" b="1" dirty="0">
+                <a:solidFill>
+                  <a:srgbClr val="0A0A0A"/>
+                </a:solidFill>
+                <a:latin typeface="Noto Sans KR" panose="020B0200000000000000" pitchFamily="50" charset="-127"/>
+                <a:ea typeface="Noto Sans KR" panose="020B0200000000000000" pitchFamily="50" charset="-127"/>
+              </a:rPr>
+              <a:t>  </a:t>
+            </a:r>
+            <a:r>
+              <a:rPr lang="en-US" altLang="ko-KR" sz="1800" b="1" i="0" dirty="0">
+                <a:solidFill>
+                  <a:srgbClr val="0A0A0A"/>
+                </a:solidFill>
+                <a:effectLst/>
+                <a:latin typeface="Noto Sans KR" panose="020B0200000000000000" pitchFamily="50" charset="-127"/>
+                <a:ea typeface="Noto Sans KR" panose="020B0200000000000000" pitchFamily="50" charset="-127"/>
+              </a:rPr>
+              <a:t>:                    Dietary:</a:t>
+            </a:r>
+          </a:p>
+          <a:p>
+            <a:r>
+              <a:rPr lang="en-US" altLang="ko-KR" b="1" dirty="0">
+                <a:solidFill>
+                  <a:srgbClr val="0A0A0A"/>
+                </a:solidFill>
+                <a:latin typeface="Noto Sans KR" panose="020B0200000000000000" pitchFamily="50" charset="-127"/>
+                <a:ea typeface="Noto Sans KR" panose="020B0200000000000000" pitchFamily="50" charset="-127"/>
+              </a:rPr>
+              <a:t>                                                                              Fat                                   Fiber</a:t>
+            </a:r>
+            <a:r>
+              <a:rPr lang="en-US" altLang="ko-KR" sz="1800" b="1" i="0" dirty="0">
+                <a:solidFill>
+                  <a:srgbClr val="0A0A0A"/>
+                </a:solidFill>
+                <a:effectLst/>
+                <a:latin typeface="Noto Sans KR" panose="020B0200000000000000" pitchFamily="50" charset="-127"/>
+                <a:ea typeface="Noto Sans KR" panose="020B0200000000000000" pitchFamily="50" charset="-127"/>
+              </a:rPr>
+              <a:t> </a:t>
             </a:r>
             <a:endParaRPr lang="ko-KR" altLang="en-US" b="1" dirty="0">
               <a:latin typeface="Noto Sans KR" panose="020B0200000000000000" pitchFamily="50" charset="-127"/>
@@ -21785,7 +20221,7 @@
         <p:spPr>
           <a:xfrm>
             <a:off x="654008" y="2670532"/>
-            <a:ext cx="8017653" cy="3869547"/>
+            <a:ext cx="8417324" cy="4008827"/>
           </a:xfrm>
           <a:prstGeom prst="roundRect">
             <a:avLst/>
@@ -21835,14 +20271,14 @@
           <p:nvPr>
             <p:extLst>
               <p:ext uri="{D42A27DB-BD31-4B8C-83A1-F6EECF244321}">
-                <p14:modId xmlns:p14="http://schemas.microsoft.com/office/powerpoint/2010/main" val="3296951940"/>
+                <p14:modId xmlns:p14="http://schemas.microsoft.com/office/powerpoint/2010/main" val="3431421085"/>
               </p:ext>
             </p:extLst>
           </p:nvPr>
         </p:nvGraphicFramePr>
         <p:xfrm>
           <a:off x="9593342" y="1515542"/>
-          <a:ext cx="2448492" cy="3962400"/>
+          <a:ext cx="2448492" cy="3230880"/>
         </p:xfrm>
         <a:graphic>
           <a:graphicData uri="http://schemas.openxmlformats.org/drawingml/2006/table">
@@ -22312,242 +20748,6 @@
                   </a:ext>
                 </a:extLst>
               </a:tr>
-              <a:tr h="355331">
-                <a:tc>
-                  <a:txBody>
-                    <a:bodyPr/>
-                    <a:lstStyle/>
-                    <a:p>
-                      <a:pPr algn="ctr" latinLnBrk="1"/>
-                      <a:r>
-                        <a:rPr lang="en-US" altLang="ko-KR" dirty="0">
-                          <a:latin typeface="Noto Sans KR" panose="020B0200000000000000" pitchFamily="50" charset="-127"/>
-                          <a:ea typeface="Noto Sans KR" panose="020B0200000000000000" pitchFamily="50" charset="-127"/>
-                        </a:rPr>
-                        <a:t>3</a:t>
-                      </a:r>
-                      <a:endParaRPr lang="ko-KR" altLang="en-US" dirty="0">
-                        <a:latin typeface="Noto Sans KR" panose="020B0200000000000000" pitchFamily="50" charset="-127"/>
-                        <a:ea typeface="Noto Sans KR" panose="020B0200000000000000" pitchFamily="50" charset="-127"/>
-                      </a:endParaRPr>
-                    </a:p>
-                  </a:txBody>
-                  <a:tcPr>
-                    <a:lnL w="12700" cap="flat" cmpd="sng" algn="ctr">
-                      <a:solidFill>
-                        <a:schemeClr val="tx1"/>
-                      </a:solidFill>
-                      <a:prstDash val="solid"/>
-                      <a:round/>
-                      <a:headEnd type="none" w="med" len="med"/>
-                      <a:tailEnd type="none" w="med" len="med"/>
-                    </a:lnL>
-                    <a:lnR w="12700" cap="flat" cmpd="sng" algn="ctr">
-                      <a:solidFill>
-                        <a:schemeClr val="tx1"/>
-                      </a:solidFill>
-                      <a:prstDash val="solid"/>
-                      <a:round/>
-                      <a:headEnd type="none" w="med" len="med"/>
-                      <a:tailEnd type="none" w="med" len="med"/>
-                    </a:lnR>
-                    <a:lnT w="12700" cap="flat" cmpd="sng" algn="ctr">
-                      <a:solidFill>
-                        <a:schemeClr val="tx1"/>
-                      </a:solidFill>
-                      <a:prstDash val="solid"/>
-                      <a:round/>
-                      <a:headEnd type="none" w="med" len="med"/>
-                      <a:tailEnd type="none" w="med" len="med"/>
-                    </a:lnT>
-                    <a:lnB w="12700" cap="flat" cmpd="sng" algn="ctr">
-                      <a:solidFill>
-                        <a:schemeClr val="tx1"/>
-                      </a:solidFill>
-                      <a:prstDash val="solid"/>
-                      <a:round/>
-                      <a:headEnd type="none" w="med" len="med"/>
-                      <a:tailEnd type="none" w="med" len="med"/>
-                    </a:lnB>
-                    <a:noFill/>
-                  </a:tcPr>
-                </a:tc>
-                <a:tc>
-                  <a:txBody>
-                    <a:bodyPr/>
-                    <a:lstStyle/>
-                    <a:p>
-                      <a:pPr algn="ctr" latinLnBrk="1"/>
-                      <a:endParaRPr lang="ko-KR" altLang="en-US" dirty="0">
-                        <a:latin typeface="Noto Sans KR" panose="020B0200000000000000" pitchFamily="50" charset="-127"/>
-                        <a:ea typeface="Noto Sans KR" panose="020B0200000000000000" pitchFamily="50" charset="-127"/>
-                      </a:endParaRPr>
-                    </a:p>
-                  </a:txBody>
-                  <a:tcPr>
-                    <a:lnL w="12700" cap="flat" cmpd="sng" algn="ctr">
-                      <a:solidFill>
-                        <a:schemeClr val="tx1"/>
-                      </a:solidFill>
-                      <a:prstDash val="solid"/>
-                      <a:round/>
-                      <a:headEnd type="none" w="med" len="med"/>
-                      <a:tailEnd type="none" w="med" len="med"/>
-                    </a:lnL>
-                    <a:lnR w="12700" cap="flat" cmpd="sng" algn="ctr">
-                      <a:solidFill>
-                        <a:schemeClr val="tx1"/>
-                      </a:solidFill>
-                      <a:prstDash val="solid"/>
-                      <a:round/>
-                      <a:headEnd type="none" w="med" len="med"/>
-                      <a:tailEnd type="none" w="med" len="med"/>
-                    </a:lnR>
-                    <a:lnT w="12700" cap="flat" cmpd="sng" algn="ctr">
-                      <a:solidFill>
-                        <a:schemeClr val="tx1"/>
-                      </a:solidFill>
-                      <a:prstDash val="solid"/>
-                      <a:round/>
-                      <a:headEnd type="none" w="med" len="med"/>
-                      <a:tailEnd type="none" w="med" len="med"/>
-                    </a:lnT>
-                    <a:lnB w="12700" cap="flat" cmpd="sng" algn="ctr">
-                      <a:solidFill>
-                        <a:schemeClr val="tx1"/>
-                      </a:solidFill>
-                      <a:prstDash val="solid"/>
-                      <a:round/>
-                      <a:headEnd type="none" w="med" len="med"/>
-                      <a:tailEnd type="none" w="med" len="med"/>
-                    </a:lnB>
-                    <a:noFill/>
-                  </a:tcPr>
-                </a:tc>
-                <a:extLst>
-                  <a:ext uri="{0D108BD9-81ED-4DB2-BD59-A6C34878D82A}">
-                    <a16:rowId xmlns:a16="http://schemas.microsoft.com/office/drawing/2014/main" val="1888026692"/>
-                  </a:ext>
-                </a:extLst>
-              </a:tr>
-              <a:tr h="355331">
-                <a:tc>
-                  <a:txBody>
-                    <a:bodyPr/>
-                    <a:lstStyle/>
-                    <a:p>
-                      <a:pPr algn="ctr" latinLnBrk="1"/>
-                      <a:r>
-                        <a:rPr lang="en-US" altLang="ko-KR" dirty="0">
-                          <a:latin typeface="Noto Sans KR" panose="020B0200000000000000" pitchFamily="50" charset="-127"/>
-                          <a:ea typeface="Noto Sans KR" panose="020B0200000000000000" pitchFamily="50" charset="-127"/>
-                        </a:rPr>
-                        <a:t>4</a:t>
-                      </a:r>
-                      <a:endParaRPr lang="ko-KR" altLang="en-US" dirty="0">
-                        <a:latin typeface="Noto Sans KR" panose="020B0200000000000000" pitchFamily="50" charset="-127"/>
-                        <a:ea typeface="Noto Sans KR" panose="020B0200000000000000" pitchFamily="50" charset="-127"/>
-                      </a:endParaRPr>
-                    </a:p>
-                  </a:txBody>
-                  <a:tcPr>
-                    <a:lnL w="12700" cap="flat" cmpd="sng" algn="ctr">
-                      <a:solidFill>
-                        <a:schemeClr val="tx1"/>
-                      </a:solidFill>
-                      <a:prstDash val="solid"/>
-                      <a:round/>
-                      <a:headEnd type="none" w="med" len="med"/>
-                      <a:tailEnd type="none" w="med" len="med"/>
-                    </a:lnL>
-                    <a:lnR w="12700" cap="flat" cmpd="sng" algn="ctr">
-                      <a:solidFill>
-                        <a:schemeClr val="tx1"/>
-                      </a:solidFill>
-                      <a:prstDash val="solid"/>
-                      <a:round/>
-                      <a:headEnd type="none" w="med" len="med"/>
-                      <a:tailEnd type="none" w="med" len="med"/>
-                    </a:lnR>
-                    <a:lnT w="12700" cap="flat" cmpd="sng" algn="ctr">
-                      <a:solidFill>
-                        <a:schemeClr val="tx1"/>
-                      </a:solidFill>
-                      <a:prstDash val="solid"/>
-                      <a:round/>
-                      <a:headEnd type="none" w="med" len="med"/>
-                      <a:tailEnd type="none" w="med" len="med"/>
-                    </a:lnT>
-                    <a:lnB w="12700" cap="flat" cmpd="sng" algn="ctr">
-                      <a:solidFill>
-                        <a:schemeClr val="tx1"/>
-                      </a:solidFill>
-                      <a:prstDash val="solid"/>
-                      <a:round/>
-                      <a:headEnd type="none" w="med" len="med"/>
-                      <a:tailEnd type="none" w="med" len="med"/>
-                    </a:lnB>
-                    <a:noFill/>
-                  </a:tcPr>
-                </a:tc>
-                <a:tc>
-                  <a:txBody>
-                    <a:bodyPr/>
-                    <a:lstStyle/>
-                    <a:p>
-                      <a:pPr algn="ctr" latinLnBrk="1"/>
-                      <a:endParaRPr lang="ko-KR" altLang="en-US" dirty="0">
-                        <a:latin typeface="Noto Sans KR" panose="020B0200000000000000" pitchFamily="50" charset="-127"/>
-                        <a:ea typeface="Noto Sans KR" panose="020B0200000000000000" pitchFamily="50" charset="-127"/>
-                      </a:endParaRPr>
-                    </a:p>
-                  </a:txBody>
-                  <a:tcPr>
-                    <a:lnL w="12700" cap="flat" cmpd="sng" algn="ctr">
-                      <a:solidFill>
-                        <a:schemeClr val="tx1"/>
-                      </a:solidFill>
-                      <a:prstDash val="solid"/>
-                      <a:round/>
-                      <a:headEnd type="none" w="med" len="med"/>
-                      <a:tailEnd type="none" w="med" len="med"/>
-                    </a:lnL>
-                    <a:lnR w="12700" cap="flat" cmpd="sng" algn="ctr">
-                      <a:solidFill>
-                        <a:schemeClr val="tx1"/>
-                      </a:solidFill>
-                      <a:prstDash val="solid"/>
-                      <a:round/>
-                      <a:headEnd type="none" w="med" len="med"/>
-                      <a:tailEnd type="none" w="med" len="med"/>
-                    </a:lnR>
-                    <a:lnT w="12700" cap="flat" cmpd="sng" algn="ctr">
-                      <a:solidFill>
-                        <a:schemeClr val="tx1"/>
-                      </a:solidFill>
-                      <a:prstDash val="solid"/>
-                      <a:round/>
-                      <a:headEnd type="none" w="med" len="med"/>
-                      <a:tailEnd type="none" w="med" len="med"/>
-                    </a:lnT>
-                    <a:lnB w="12700" cap="flat" cmpd="sng" algn="ctr">
-                      <a:solidFill>
-                        <a:schemeClr val="tx1"/>
-                      </a:solidFill>
-                      <a:prstDash val="solid"/>
-                      <a:round/>
-                      <a:headEnd type="none" w="med" len="med"/>
-                      <a:tailEnd type="none" w="med" len="med"/>
-                    </a:lnB>
-                    <a:noFill/>
-                  </a:tcPr>
-                </a:tc>
-                <a:extLst>
-                  <a:ext uri="{0D108BD9-81ED-4DB2-BD59-A6C34878D82A}">
-                    <a16:rowId xmlns:a16="http://schemas.microsoft.com/office/drawing/2014/main" val="163760298"/>
-                  </a:ext>
-                </a:extLst>
-              </a:tr>
             </a:tbl>
           </a:graphicData>
         </a:graphic>
@@ -22567,13 +20767,13 @@
           <p:nvPr>
             <p:extLst>
               <p:ext uri="{D42A27DB-BD31-4B8C-83A1-F6EECF244321}">
-                <p14:modId xmlns:p14="http://schemas.microsoft.com/office/powerpoint/2010/main" val="2405651178"/>
+                <p14:modId xmlns:p14="http://schemas.microsoft.com/office/powerpoint/2010/main" val="404419677"/>
               </p:ext>
             </p:extLst>
           </p:nvPr>
         </p:nvGraphicFramePr>
         <p:xfrm>
-          <a:off x="195431" y="256973"/>
+          <a:off x="-732" y="329061"/>
           <a:ext cx="10818320" cy="736600"/>
         </p:xfrm>
         <a:graphic>
@@ -23736,6 +21936,125 @@
           </a:graphicData>
         </a:graphic>
       </p:graphicFrame>
+      <p:sp>
+        <p:nvSpPr>
+          <p:cNvPr id="5" name="TextBox 4">
+            <a:extLst>
+              <a:ext uri="{FF2B5EF4-FFF2-40B4-BE49-F238E27FC236}">
+                <a16:creationId xmlns:a16="http://schemas.microsoft.com/office/drawing/2014/main" id="{752C7686-F2B9-2B0B-B620-DFF1B4184D5E}"/>
+              </a:ext>
+            </a:extLst>
+          </p:cNvPr>
+          <p:cNvSpPr txBox="1"/>
+          <p:nvPr/>
+        </p:nvSpPr>
+        <p:spPr>
+          <a:xfrm>
+            <a:off x="1794484" y="4803383"/>
+            <a:ext cx="6986177" cy="369332"/>
+          </a:xfrm>
+          <a:prstGeom prst="rect">
+            <a:avLst/>
+          </a:prstGeom>
+          <a:noFill/>
+        </p:spPr>
+        <p:txBody>
+          <a:bodyPr wrap="square" rtlCol="0">
+            <a:spAutoFit/>
+          </a:bodyPr>
+          <a:lstStyle/>
+          <a:p>
+            <a:r>
+              <a:rPr lang="en-US" altLang="ko-KR" dirty="0"/>
+              <a:t>   (g)                     (g)                  (g)                         (g) </a:t>
+            </a:r>
+            <a:endParaRPr lang="ko-KR" altLang="en-US" dirty="0"/>
+          </a:p>
+        </p:txBody>
+      </p:sp>
+      <p:sp>
+        <p:nvSpPr>
+          <p:cNvPr id="16" name="TextBox 15">
+            <a:extLst>
+              <a:ext uri="{FF2B5EF4-FFF2-40B4-BE49-F238E27FC236}">
+                <a16:creationId xmlns:a16="http://schemas.microsoft.com/office/drawing/2014/main" id="{202CC4B6-A479-8EC9-66C0-886D143495F3}"/>
+              </a:ext>
+            </a:extLst>
+          </p:cNvPr>
+          <p:cNvSpPr txBox="1"/>
+          <p:nvPr/>
+        </p:nvSpPr>
+        <p:spPr>
+          <a:xfrm>
+            <a:off x="2078089" y="5792157"/>
+            <a:ext cx="6702572" cy="369332"/>
+          </a:xfrm>
+          <a:prstGeom prst="rect">
+            <a:avLst/>
+          </a:prstGeom>
+          <a:noFill/>
+        </p:spPr>
+        <p:txBody>
+          <a:bodyPr wrap="square" rtlCol="0">
+            <a:spAutoFit/>
+          </a:bodyPr>
+          <a:lstStyle/>
+          <a:p>
+            <a:r>
+              <a:rPr lang="en-US" altLang="ko-KR" dirty="0"/>
+              <a:t>(mg)                     (mg)                       (g)                 (g) </a:t>
+            </a:r>
+            <a:endParaRPr lang="ko-KR" altLang="en-US" dirty="0"/>
+          </a:p>
+        </p:txBody>
+      </p:sp>
+      <p:sp>
+        <p:nvSpPr>
+          <p:cNvPr id="18" name="사각형: 둥근 모서리 17">
+            <a:extLst>
+              <a:ext uri="{FF2B5EF4-FFF2-40B4-BE49-F238E27FC236}">
+                <a16:creationId xmlns:a16="http://schemas.microsoft.com/office/drawing/2014/main" id="{514B5598-DA3D-875C-6E1B-C0B8654AFE34}"/>
+              </a:ext>
+            </a:extLst>
+          </p:cNvPr>
+          <p:cNvSpPr/>
+          <p:nvPr/>
+        </p:nvSpPr>
+        <p:spPr>
+          <a:xfrm>
+            <a:off x="1053679" y="4746422"/>
+            <a:ext cx="7665204" cy="1702823"/>
+          </a:xfrm>
+          <a:prstGeom prst="roundRect">
+            <a:avLst/>
+          </a:prstGeom>
+          <a:noFill/>
+        </p:spPr>
+        <p:style>
+          <a:lnRef idx="2">
+            <a:schemeClr val="accent1">
+              <a:shade val="15000"/>
+            </a:schemeClr>
+          </a:lnRef>
+          <a:fillRef idx="1">
+            <a:schemeClr val="accent1"/>
+          </a:fillRef>
+          <a:effectRef idx="0">
+            <a:schemeClr val="accent1"/>
+          </a:effectRef>
+          <a:fontRef idx="minor">
+            <a:schemeClr val="lt1"/>
+          </a:fontRef>
+        </p:style>
+        <p:txBody>
+          <a:bodyPr rtlCol="0" anchor="ctr"/>
+          <a:lstStyle/>
+          <a:p>
+            <a:pPr algn="ctr"/>
+            <a:endParaRPr lang="ko-KR" altLang="en-US"/>
+          </a:p>
+        </p:txBody>
+      </p:sp>
     </p:spTree>
     <p:extLst>
       <p:ext uri="{BB962C8B-B14F-4D97-AF65-F5344CB8AC3E}">
@@ -23780,7 +22099,7 @@
         </p:nvSpPr>
         <p:spPr>
           <a:xfrm>
-            <a:off x="195431" y="1655315"/>
+            <a:off x="144047" y="1644763"/>
             <a:ext cx="1019921" cy="518656"/>
           </a:xfrm>
           <a:prstGeom prst="ellipse">
@@ -24085,14 +22404,14 @@
           <p:nvPr>
             <p:extLst>
               <p:ext uri="{D42A27DB-BD31-4B8C-83A1-F6EECF244321}">
-                <p14:modId xmlns:p14="http://schemas.microsoft.com/office/powerpoint/2010/main" val="3897989341"/>
+                <p14:modId xmlns:p14="http://schemas.microsoft.com/office/powerpoint/2010/main" val="651380414"/>
               </p:ext>
             </p:extLst>
           </p:nvPr>
         </p:nvGraphicFramePr>
         <p:xfrm>
           <a:off x="9593342" y="1515542"/>
-          <a:ext cx="2448492" cy="2042160"/>
+          <a:ext cx="2448492" cy="944880"/>
         </p:xfrm>
         <a:graphic>
           <a:graphicData uri="http://schemas.openxmlformats.org/drawingml/2006/table">
@@ -24374,360 +22693,6 @@
                   </a:ext>
                 </a:extLst>
               </a:tr>
-              <a:tr h="355331">
-                <a:tc>
-                  <a:txBody>
-                    <a:bodyPr/>
-                    <a:lstStyle/>
-                    <a:p>
-                      <a:pPr algn="ctr" latinLnBrk="1"/>
-                      <a:r>
-                        <a:rPr lang="en-US" altLang="ko-KR" dirty="0">
-                          <a:latin typeface="Noto Sans KR" panose="020B0200000000000000" pitchFamily="50" charset="-127"/>
-                          <a:ea typeface="Noto Sans KR" panose="020B0200000000000000" pitchFamily="50" charset="-127"/>
-                        </a:rPr>
-                        <a:t>2</a:t>
-                      </a:r>
-                      <a:endParaRPr lang="ko-KR" altLang="en-US" dirty="0">
-                        <a:latin typeface="Noto Sans KR" panose="020B0200000000000000" pitchFamily="50" charset="-127"/>
-                        <a:ea typeface="Noto Sans KR" panose="020B0200000000000000" pitchFamily="50" charset="-127"/>
-                      </a:endParaRPr>
-                    </a:p>
-                  </a:txBody>
-                  <a:tcPr>
-                    <a:lnL w="12700" cap="flat" cmpd="sng" algn="ctr">
-                      <a:solidFill>
-                        <a:schemeClr val="tx1"/>
-                      </a:solidFill>
-                      <a:prstDash val="solid"/>
-                      <a:round/>
-                      <a:headEnd type="none" w="med" len="med"/>
-                      <a:tailEnd type="none" w="med" len="med"/>
-                    </a:lnL>
-                    <a:lnR w="12700" cap="flat" cmpd="sng" algn="ctr">
-                      <a:solidFill>
-                        <a:schemeClr val="tx1"/>
-                      </a:solidFill>
-                      <a:prstDash val="solid"/>
-                      <a:round/>
-                      <a:headEnd type="none" w="med" len="med"/>
-                      <a:tailEnd type="none" w="med" len="med"/>
-                    </a:lnR>
-                    <a:lnT w="12700" cap="flat" cmpd="sng" algn="ctr">
-                      <a:solidFill>
-                        <a:schemeClr val="tx1"/>
-                      </a:solidFill>
-                      <a:prstDash val="solid"/>
-                      <a:round/>
-                      <a:headEnd type="none" w="med" len="med"/>
-                      <a:tailEnd type="none" w="med" len="med"/>
-                    </a:lnT>
-                    <a:lnB w="12700" cap="flat" cmpd="sng" algn="ctr">
-                      <a:solidFill>
-                        <a:schemeClr val="tx1"/>
-                      </a:solidFill>
-                      <a:prstDash val="solid"/>
-                      <a:round/>
-                      <a:headEnd type="none" w="med" len="med"/>
-                      <a:tailEnd type="none" w="med" len="med"/>
-                    </a:lnB>
-                    <a:noFill/>
-                  </a:tcPr>
-                </a:tc>
-                <a:tc>
-                  <a:txBody>
-                    <a:bodyPr/>
-                    <a:lstStyle/>
-                    <a:p>
-                      <a:pPr algn="ctr" latinLnBrk="1"/>
-                      <a:endParaRPr lang="ko-KR" altLang="en-US" dirty="0">
-                        <a:latin typeface="Noto Sans KR" panose="020B0200000000000000" pitchFamily="50" charset="-127"/>
-                        <a:ea typeface="Noto Sans KR" panose="020B0200000000000000" pitchFamily="50" charset="-127"/>
-                      </a:endParaRPr>
-                    </a:p>
-                  </a:txBody>
-                  <a:tcPr>
-                    <a:lnL w="12700" cap="flat" cmpd="sng" algn="ctr">
-                      <a:solidFill>
-                        <a:schemeClr val="tx1"/>
-                      </a:solidFill>
-                      <a:prstDash val="solid"/>
-                      <a:round/>
-                      <a:headEnd type="none" w="med" len="med"/>
-                      <a:tailEnd type="none" w="med" len="med"/>
-                    </a:lnL>
-                    <a:lnR w="12700" cap="flat" cmpd="sng" algn="ctr">
-                      <a:solidFill>
-                        <a:schemeClr val="tx1"/>
-                      </a:solidFill>
-                      <a:prstDash val="solid"/>
-                      <a:round/>
-                      <a:headEnd type="none" w="med" len="med"/>
-                      <a:tailEnd type="none" w="med" len="med"/>
-                    </a:lnR>
-                    <a:lnT w="12700" cap="flat" cmpd="sng" algn="ctr">
-                      <a:solidFill>
-                        <a:schemeClr val="tx1"/>
-                      </a:solidFill>
-                      <a:prstDash val="solid"/>
-                      <a:round/>
-                      <a:headEnd type="none" w="med" len="med"/>
-                      <a:tailEnd type="none" w="med" len="med"/>
-                    </a:lnT>
-                    <a:lnB w="12700" cap="flat" cmpd="sng" algn="ctr">
-                      <a:solidFill>
-                        <a:schemeClr val="tx1"/>
-                      </a:solidFill>
-                      <a:prstDash val="solid"/>
-                      <a:round/>
-                      <a:headEnd type="none" w="med" len="med"/>
-                      <a:tailEnd type="none" w="med" len="med"/>
-                    </a:lnB>
-                    <a:noFill/>
-                  </a:tcPr>
-                </a:tc>
-                <a:extLst>
-                  <a:ext uri="{0D108BD9-81ED-4DB2-BD59-A6C34878D82A}">
-                    <a16:rowId xmlns:a16="http://schemas.microsoft.com/office/drawing/2014/main" val="2175718920"/>
-                  </a:ext>
-                </a:extLst>
-              </a:tr>
-              <a:tr h="355331">
-                <a:tc>
-                  <a:txBody>
-                    <a:bodyPr/>
-                    <a:lstStyle/>
-                    <a:p>
-                      <a:pPr algn="ctr" latinLnBrk="1"/>
-                      <a:r>
-                        <a:rPr lang="en-US" altLang="ko-KR" dirty="0">
-                          <a:latin typeface="Noto Sans KR" panose="020B0200000000000000" pitchFamily="50" charset="-127"/>
-                          <a:ea typeface="Noto Sans KR" panose="020B0200000000000000" pitchFamily="50" charset="-127"/>
-                        </a:rPr>
-                        <a:t>3</a:t>
-                      </a:r>
-                      <a:endParaRPr lang="ko-KR" altLang="en-US" dirty="0">
-                        <a:latin typeface="Noto Sans KR" panose="020B0200000000000000" pitchFamily="50" charset="-127"/>
-                        <a:ea typeface="Noto Sans KR" panose="020B0200000000000000" pitchFamily="50" charset="-127"/>
-                      </a:endParaRPr>
-                    </a:p>
-                  </a:txBody>
-                  <a:tcPr>
-                    <a:lnL w="12700" cap="flat" cmpd="sng" algn="ctr">
-                      <a:solidFill>
-                        <a:schemeClr val="tx1"/>
-                      </a:solidFill>
-                      <a:prstDash val="solid"/>
-                      <a:round/>
-                      <a:headEnd type="none" w="med" len="med"/>
-                      <a:tailEnd type="none" w="med" len="med"/>
-                    </a:lnL>
-                    <a:lnR w="12700" cap="flat" cmpd="sng" algn="ctr">
-                      <a:solidFill>
-                        <a:schemeClr val="tx1"/>
-                      </a:solidFill>
-                      <a:prstDash val="solid"/>
-                      <a:round/>
-                      <a:headEnd type="none" w="med" len="med"/>
-                      <a:tailEnd type="none" w="med" len="med"/>
-                    </a:lnR>
-                    <a:lnT w="12700" cap="flat" cmpd="sng" algn="ctr">
-                      <a:solidFill>
-                        <a:schemeClr val="tx1"/>
-                      </a:solidFill>
-                      <a:prstDash val="solid"/>
-                      <a:round/>
-                      <a:headEnd type="none" w="med" len="med"/>
-                      <a:tailEnd type="none" w="med" len="med"/>
-                    </a:lnT>
-                    <a:lnB w="12700" cap="flat" cmpd="sng" algn="ctr">
-                      <a:solidFill>
-                        <a:schemeClr val="tx1"/>
-                      </a:solidFill>
-                      <a:prstDash val="solid"/>
-                      <a:round/>
-                      <a:headEnd type="none" w="med" len="med"/>
-                      <a:tailEnd type="none" w="med" len="med"/>
-                    </a:lnB>
-                    <a:noFill/>
-                  </a:tcPr>
-                </a:tc>
-                <a:tc>
-                  <a:txBody>
-                    <a:bodyPr/>
-                    <a:lstStyle/>
-                    <a:p>
-                      <a:pPr algn="ctr" latinLnBrk="1"/>
-                      <a:endParaRPr lang="ko-KR" altLang="en-US" dirty="0">
-                        <a:latin typeface="Noto Sans KR" panose="020B0200000000000000" pitchFamily="50" charset="-127"/>
-                        <a:ea typeface="Noto Sans KR" panose="020B0200000000000000" pitchFamily="50" charset="-127"/>
-                      </a:endParaRPr>
-                    </a:p>
-                  </a:txBody>
-                  <a:tcPr>
-                    <a:lnL w="12700" cap="flat" cmpd="sng" algn="ctr">
-                      <a:solidFill>
-                        <a:schemeClr val="tx1"/>
-                      </a:solidFill>
-                      <a:prstDash val="solid"/>
-                      <a:round/>
-                      <a:headEnd type="none" w="med" len="med"/>
-                      <a:tailEnd type="none" w="med" len="med"/>
-                    </a:lnL>
-                    <a:lnR w="12700" cap="flat" cmpd="sng" algn="ctr">
-                      <a:solidFill>
-                        <a:schemeClr val="tx1"/>
-                      </a:solidFill>
-                      <a:prstDash val="solid"/>
-                      <a:round/>
-                      <a:headEnd type="none" w="med" len="med"/>
-                      <a:tailEnd type="none" w="med" len="med"/>
-                    </a:lnR>
-                    <a:lnT w="12700" cap="flat" cmpd="sng" algn="ctr">
-                      <a:solidFill>
-                        <a:schemeClr val="tx1"/>
-                      </a:solidFill>
-                      <a:prstDash val="solid"/>
-                      <a:round/>
-                      <a:headEnd type="none" w="med" len="med"/>
-                      <a:tailEnd type="none" w="med" len="med"/>
-                    </a:lnT>
-                    <a:lnB w="12700" cap="flat" cmpd="sng" algn="ctr">
-                      <a:solidFill>
-                        <a:schemeClr val="tx1"/>
-                      </a:solidFill>
-                      <a:prstDash val="solid"/>
-                      <a:round/>
-                      <a:headEnd type="none" w="med" len="med"/>
-                      <a:tailEnd type="none" w="med" len="med"/>
-                    </a:lnB>
-                    <a:noFill/>
-                  </a:tcPr>
-                </a:tc>
-                <a:extLst>
-                  <a:ext uri="{0D108BD9-81ED-4DB2-BD59-A6C34878D82A}">
-                    <a16:rowId xmlns:a16="http://schemas.microsoft.com/office/drawing/2014/main" val="1888026692"/>
-                  </a:ext>
-                </a:extLst>
-              </a:tr>
-              <a:tr h="355331">
-                <a:tc>
-                  <a:txBody>
-                    <a:bodyPr/>
-                    <a:lstStyle/>
-                    <a:p>
-                      <a:pPr algn="ctr" latinLnBrk="1"/>
-                      <a:r>
-                        <a:rPr lang="en-US" altLang="ko-KR" dirty="0">
-                          <a:latin typeface="Noto Sans KR" panose="020B0200000000000000" pitchFamily="50" charset="-127"/>
-                          <a:ea typeface="Noto Sans KR" panose="020B0200000000000000" pitchFamily="50" charset="-127"/>
-                        </a:rPr>
-                        <a:t>4</a:t>
-                      </a:r>
-                      <a:endParaRPr lang="ko-KR" altLang="en-US" dirty="0">
-                        <a:latin typeface="Noto Sans KR" panose="020B0200000000000000" pitchFamily="50" charset="-127"/>
-                        <a:ea typeface="Noto Sans KR" panose="020B0200000000000000" pitchFamily="50" charset="-127"/>
-                      </a:endParaRPr>
-                    </a:p>
-                  </a:txBody>
-                  <a:tcPr>
-                    <a:lnL w="12700" cap="flat" cmpd="sng" algn="ctr">
-                      <a:solidFill>
-                        <a:schemeClr val="tx1"/>
-                      </a:solidFill>
-                      <a:prstDash val="solid"/>
-                      <a:round/>
-                      <a:headEnd type="none" w="med" len="med"/>
-                      <a:tailEnd type="none" w="med" len="med"/>
-                    </a:lnL>
-                    <a:lnR w="12700" cap="flat" cmpd="sng" algn="ctr">
-                      <a:solidFill>
-                        <a:schemeClr val="tx1"/>
-                      </a:solidFill>
-                      <a:prstDash val="solid"/>
-                      <a:round/>
-                      <a:headEnd type="none" w="med" len="med"/>
-                      <a:tailEnd type="none" w="med" len="med"/>
-                    </a:lnR>
-                    <a:lnT w="12700" cap="flat" cmpd="sng" algn="ctr">
-                      <a:solidFill>
-                        <a:schemeClr val="tx1"/>
-                      </a:solidFill>
-                      <a:prstDash val="solid"/>
-                      <a:round/>
-                      <a:headEnd type="none" w="med" len="med"/>
-                      <a:tailEnd type="none" w="med" len="med"/>
-                    </a:lnT>
-                    <a:lnB w="12700" cap="flat" cmpd="sng" algn="ctr">
-                      <a:solidFill>
-                        <a:schemeClr val="tx1"/>
-                      </a:solidFill>
-                      <a:prstDash val="solid"/>
-                      <a:round/>
-                      <a:headEnd type="none" w="med" len="med"/>
-                      <a:tailEnd type="none" w="med" len="med"/>
-                    </a:lnB>
-                    <a:noFill/>
-                  </a:tcPr>
-                </a:tc>
-                <a:tc>
-                  <a:txBody>
-                    <a:bodyPr/>
-                    <a:lstStyle/>
-                    <a:p>
-                      <a:pPr algn="ctr" latinLnBrk="1"/>
-                      <a:endParaRPr lang="ko-KR" altLang="en-US" dirty="0">
-                        <a:latin typeface="Noto Sans KR" panose="020B0200000000000000" pitchFamily="50" charset="-127"/>
-                        <a:ea typeface="Noto Sans KR" panose="020B0200000000000000" pitchFamily="50" charset="-127"/>
-                      </a:endParaRPr>
-                    </a:p>
-                  </a:txBody>
-                  <a:tcPr>
-                    <a:lnL w="12700" cap="flat" cmpd="sng" algn="ctr">
-                      <a:solidFill>
-                        <a:schemeClr val="tx1"/>
-                      </a:solidFill>
-                      <a:prstDash val="solid"/>
-                      <a:round/>
-                      <a:headEnd type="none" w="med" len="med"/>
-                      <a:tailEnd type="none" w="med" len="med"/>
-                    </a:lnL>
-                    <a:lnR w="12700" cap="flat" cmpd="sng" algn="ctr">
-                      <a:solidFill>
-                        <a:schemeClr val="tx1"/>
-                      </a:solidFill>
-                      <a:prstDash val="solid"/>
-                      <a:round/>
-                      <a:headEnd type="none" w="med" len="med"/>
-                      <a:tailEnd type="none" w="med" len="med"/>
-                    </a:lnR>
-                    <a:lnT w="12700" cap="flat" cmpd="sng" algn="ctr">
-                      <a:solidFill>
-                        <a:schemeClr val="tx1"/>
-                      </a:solidFill>
-                      <a:prstDash val="solid"/>
-                      <a:round/>
-                      <a:headEnd type="none" w="med" len="med"/>
-                      <a:tailEnd type="none" w="med" len="med"/>
-                    </a:lnT>
-                    <a:lnB w="12700" cap="flat" cmpd="sng" algn="ctr">
-                      <a:solidFill>
-                        <a:schemeClr val="tx1"/>
-                      </a:solidFill>
-                      <a:prstDash val="solid"/>
-                      <a:round/>
-                      <a:headEnd type="none" w="med" len="med"/>
-                      <a:tailEnd type="none" w="med" len="med"/>
-                    </a:lnB>
-                    <a:noFill/>
-                  </a:tcPr>
-                </a:tc>
-                <a:extLst>
-                  <a:ext uri="{0D108BD9-81ED-4DB2-BD59-A6C34878D82A}">
-                    <a16:rowId xmlns:a16="http://schemas.microsoft.com/office/drawing/2014/main" val="163760298"/>
-                  </a:ext>
-                </a:extLst>
-              </a:tr>
             </a:tbl>
           </a:graphicData>
         </a:graphic>
@@ -24747,13 +22712,13 @@
           <p:nvPr>
             <p:extLst>
               <p:ext uri="{D42A27DB-BD31-4B8C-83A1-F6EECF244321}">
-                <p14:modId xmlns:p14="http://schemas.microsoft.com/office/powerpoint/2010/main" val="2925847098"/>
+                <p14:modId xmlns:p14="http://schemas.microsoft.com/office/powerpoint/2010/main" val="2233784851"/>
               </p:ext>
             </p:extLst>
           </p:nvPr>
         </p:nvGraphicFramePr>
         <p:xfrm>
-          <a:off x="195431" y="256973"/>
+          <a:off x="0" y="319905"/>
           <a:ext cx="10818319" cy="736600"/>
         </p:xfrm>
         <a:graphic>
@@ -25844,7 +23809,7 @@
           <p:nvPr>
             <p:extLst>
               <p:ext uri="{D42A27DB-BD31-4B8C-83A1-F6EECF244321}">
-                <p14:modId xmlns:p14="http://schemas.microsoft.com/office/powerpoint/2010/main" val="2768578628"/>
+                <p14:modId xmlns:p14="http://schemas.microsoft.com/office/powerpoint/2010/main" val="2131598327"/>
               </p:ext>
             </p:extLst>
           </p:nvPr>
@@ -25903,7 +23868,7 @@
         </p:nvSpPr>
         <p:spPr>
           <a:xfrm>
-            <a:off x="195431" y="1655315"/>
+            <a:off x="144047" y="1641534"/>
             <a:ext cx="1019921" cy="518656"/>
           </a:xfrm>
           <a:prstGeom prst="ellipse">
@@ -26647,14 +24612,14 @@
           <p:nvPr>
             <p:extLst>
               <p:ext uri="{D42A27DB-BD31-4B8C-83A1-F6EECF244321}">
-                <p14:modId xmlns:p14="http://schemas.microsoft.com/office/powerpoint/2010/main" val="1446327311"/>
+                <p14:modId xmlns:p14="http://schemas.microsoft.com/office/powerpoint/2010/main" val="4017104406"/>
               </p:ext>
             </p:extLst>
           </p:nvPr>
         </p:nvGraphicFramePr>
         <p:xfrm>
           <a:off x="9593342" y="1515542"/>
-          <a:ext cx="2448492" cy="2377440"/>
+          <a:ext cx="2448492" cy="2926080"/>
         </p:xfrm>
         <a:graphic>
           <a:graphicData uri="http://schemas.openxmlformats.org/drawingml/2006/table">
@@ -26866,11 +24831,14 @@
                     <a:bodyPr/>
                     <a:lstStyle/>
                     <a:p>
-                      <a:pPr algn="ctr" latinLnBrk="1"/>
-                      <a:endParaRPr lang="ko-KR" altLang="en-US" dirty="0">
-                        <a:latin typeface="Noto Sans KR" panose="020B0200000000000000" pitchFamily="50" charset="-127"/>
-                        <a:ea typeface="Noto Sans KR" panose="020B0200000000000000" pitchFamily="50" charset="-127"/>
-                      </a:endParaRPr>
+                      <a:pPr algn="l" latinLnBrk="1"/>
+                      <a:r>
+                        <a:rPr lang="ko-KR" altLang="en-US" dirty="0">
+                          <a:latin typeface="Noto Sans KR" panose="020B0200000000000000" pitchFamily="50" charset="-127"/>
+                          <a:ea typeface="Noto Sans KR" panose="020B0200000000000000" pitchFamily="50" charset="-127"/>
+                        </a:rPr>
+                        <a:t>유저의 영양소 문제점</a:t>
+                      </a:r>
                     </a:p>
                   </a:txBody>
                   <a:tcPr>
@@ -26984,11 +24952,49 @@
                     <a:bodyPr/>
                     <a:lstStyle/>
                     <a:p>
-                      <a:pPr algn="ctr" latinLnBrk="1"/>
-                      <a:endParaRPr lang="ko-KR" altLang="en-US" dirty="0">
-                        <a:latin typeface="Noto Sans KR" panose="020B0200000000000000" pitchFamily="50" charset="-127"/>
-                        <a:ea typeface="Noto Sans KR" panose="020B0200000000000000" pitchFamily="50" charset="-127"/>
-                      </a:endParaRPr>
+                      <a:pPr algn="l" latinLnBrk="1"/>
+                      <a:r>
+                        <a:rPr lang="en-US" altLang="ko-KR" dirty="0">
+                          <a:latin typeface="Noto Sans KR" panose="020B0200000000000000" pitchFamily="50" charset="-127"/>
+                          <a:ea typeface="Noto Sans KR" panose="020B0200000000000000" pitchFamily="50" charset="-127"/>
+                        </a:rPr>
+                        <a:t>‘</a:t>
+                      </a:r>
+                      <a:r>
+                        <a:rPr lang="ko-KR" altLang="en-US" dirty="0">
+                          <a:latin typeface="Noto Sans KR" panose="020B0200000000000000" pitchFamily="50" charset="-127"/>
+                          <a:ea typeface="Noto Sans KR" panose="020B0200000000000000" pitchFamily="50" charset="-127"/>
+                        </a:rPr>
+                        <a:t>당을 </a:t>
+                      </a:r>
+                      <a:r>
+                        <a:rPr lang="en-US" altLang="ko-KR" dirty="0">
+                          <a:latin typeface="Noto Sans KR" panose="020B0200000000000000" pitchFamily="50" charset="-127"/>
+                          <a:ea typeface="Noto Sans KR" panose="020B0200000000000000" pitchFamily="50" charset="-127"/>
+                        </a:rPr>
+                        <a:t>15g</a:t>
+                      </a:r>
+                      <a:r>
+                        <a:rPr lang="ko-KR" altLang="en-US" dirty="0">
+                          <a:latin typeface="Noto Sans KR" panose="020B0200000000000000" pitchFamily="50" charset="-127"/>
+                          <a:ea typeface="Noto Sans KR" panose="020B0200000000000000" pitchFamily="50" charset="-127"/>
+                        </a:rPr>
+                        <a:t> 줄이세요</a:t>
+                      </a:r>
+                      <a:r>
+                        <a:rPr lang="en-US" altLang="ko-KR" dirty="0">
+                          <a:latin typeface="Noto Sans KR" panose="020B0200000000000000" pitchFamily="50" charset="-127"/>
+                          <a:ea typeface="Noto Sans KR" panose="020B0200000000000000" pitchFamily="50" charset="-127"/>
+                        </a:rPr>
+                        <a:t>’</a:t>
+                      </a:r>
+                      <a:r>
+                        <a:rPr lang="ko-KR" altLang="en-US" dirty="0">
+                          <a:latin typeface="Noto Sans KR" panose="020B0200000000000000" pitchFamily="50" charset="-127"/>
+                          <a:ea typeface="Noto Sans KR" panose="020B0200000000000000" pitchFamily="50" charset="-127"/>
+                        </a:rPr>
+                        <a:t>와 같은 가이드 제시</a:t>
+                      </a:r>
                     </a:p>
                   </a:txBody>
                   <a:tcPr>
@@ -27102,7 +25108,7 @@
                     <a:bodyPr/>
                     <a:lstStyle/>
                     <a:p>
-                      <a:pPr algn="ctr" latinLnBrk="1"/>
+                      <a:pPr algn="l" latinLnBrk="1"/>
                       <a:r>
                         <a:rPr lang="ko-KR" altLang="en-US" dirty="0">
                           <a:latin typeface="Noto Sans KR" panose="020B0200000000000000" pitchFamily="50" charset="-127"/>
@@ -27223,7 +25229,7 @@
                     <a:bodyPr/>
                     <a:lstStyle/>
                     <a:p>
-                      <a:pPr algn="ctr" latinLnBrk="1"/>
+                      <a:pPr algn="l" latinLnBrk="1"/>
                       <a:r>
                         <a:rPr lang="ko-KR" altLang="en-US" dirty="0">
                           <a:latin typeface="Noto Sans KR" panose="020B0200000000000000" pitchFamily="50" charset="-127"/>
@@ -27309,13 +25315,13 @@
           <p:nvPr>
             <p:extLst>
               <p:ext uri="{D42A27DB-BD31-4B8C-83A1-F6EECF244321}">
-                <p14:modId xmlns:p14="http://schemas.microsoft.com/office/powerpoint/2010/main" val="2683500298"/>
+                <p14:modId xmlns:p14="http://schemas.microsoft.com/office/powerpoint/2010/main" val="4112774966"/>
               </p:ext>
             </p:extLst>
           </p:nvPr>
         </p:nvGraphicFramePr>
         <p:xfrm>
-          <a:off x="195431" y="256973"/>
+          <a:off x="-731" y="317921"/>
           <a:ext cx="10818319" cy="736600"/>
         </p:xfrm>
         <a:graphic>
